--- a/Curso Gas B/11 - UNE 60670 - Diseno y construccion/11 - UNE 60670 - Diseno y construccion - Vídeo 1.pptx
+++ b/Curso Gas B/11 - UNE 60670 - Diseno y construccion/11 - UNE 60670 - Diseno y construccion - Vídeo 1.pptx
@@ -21,6 +21,7 @@
     <p:sldId id="269" r:id="rId21"/>
     <p:sldId id="270" r:id="rId22"/>
     <p:sldId id="271" r:id="rId23"/>
+    <p:sldId id="272" r:id="rId24"/>
   </p:sldIdLst>
   <p:sldSz cx="12191695" cy="6858000" type="screen4x3"/>
   <p:notesSz cx="6858000" cy="9144000"/>
@@ -592,12 +593,12 @@
           <a:lstStyle/>
           <a:p>
             <a:r>
-              <a:t>N1: ¿Y en un bar o un local, se hace igual?</a:t>
-            </a:r>
-          </a:p>
-          <a:p>
-            <a:r>
-              <a:t>N2: No, en un local no doméstico cambia la lógica. En una vivienda descontabas los aparatos pequeños porque no se usan a la vez, pero en un local, por ejemplo la cocina de un restaurante, sí puede estar todo funcionando en plena hora punta. Por eso aquí sumas los consumos de todos los aparatos, sin dividir ninguno entre dos, y lo multiplicas por ese uno coma diez. Es la potencia del local. Si quieres aplicar algún coeficiente de simultaneidad para rebajarlo, puedes, pero tienes que justificarlo debidamente por escrito, no vale rebajar a ojo. La idea de fondo: donde es probable el uso simultáneo, se cuenta todo; donde no lo es, se descuenta.</a:t>
+              <a:t>N1: ¿Cómo calculo la potencia de una vivienda?</a:t>
+            </a:r>
+          </a:p>
+          <a:p>
+            <a:r>
+              <a:t>N2: Con un truco muy lógico. En una casa no todos los aparatos pesan igual, porque es rarísimo que enciendas todo a la vez. Así que la fórmula lo tiene en cuenta: los dos aparatos que más consumen, normalmente la caldera y la cocina, o la caldera y el calentador, cuentan enteros. El resto de aparatos, los secundarios, se dividen entre dos, porque casi nunca coinciden todos funcionando. Sumas eso y lo multiplicas por uno coma diez, que es un pequeño coeficiente corrector del gas. Y una regla de oro: pase lo que pase, nunca bajes de treinta kilovatios, que es el suelo obligatorio del grado uno. Aunque te salga menos, pones treinta. Ejemplo: una vivienda con caldera y cocina cuenta esos dos enteros; si además tiene un calentador auxiliar, ese va a la mitad.</a:t>
             </a:r>
           </a:p>
         </p:txBody>
@@ -667,12 +668,12 @@
           <a:lstStyle/>
           <a:p>
             <a:r>
-              <a:t>N1: ¿Y cómo calculo lo que pide el edificio entero?</a:t>
-            </a:r>
-          </a:p>
-          <a:p>
-            <a:r>
-              <a:t>N2: Sumando lo de todas las viviendas y locales que cuelgan de la misma acometida, incluidos los pisos que todavía no tienen instalación pero podrían tenerla. A las viviendas les aplicas un factor de simultaneidad, que se llama ese ene, y a los locales los sumas aparte. La clave del factor es puro sentido común: cuanto más grande es el edificio, menos probable es que todos usen el gas a la vez, así que el factor baja. Para una sola vivienda vale uno, esa sola puede tenerlo todo encendido; para más de treinta viviendas se queda en quince centésimas. Y una regla que cae fijo: existen dos factores, uno sin calefacción y otro con calefacción, y el de con calefacción siempre es mayor, porque la calefacción tira mucho gas y hace más probable que coincidan usándolo. Menos viviendas o con calefacción, factor más alto; muchas viviendas y sin calefacción, factor más bajo.</a:t>
+              <a:t>N1: ¿Y en un bar o un local, se hace igual?</a:t>
+            </a:r>
+          </a:p>
+          <a:p>
+            <a:r>
+              <a:t>N2: No, en un local no doméstico cambia la lógica. En una vivienda descontabas los aparatos pequeños porque no se usan a la vez, pero en un local, por ejemplo la cocina de un restaurante, sí puede estar todo funcionando en plena hora punta. Por eso aquí sumas los consumos de todos los aparatos, sin dividir ninguno entre dos, y lo multiplicas por ese uno coma diez. Es la potencia del local. Si quieres aplicar algún coeficiente de simultaneidad para rebajarlo, puedes, pero tienes que justificarlo debidamente por escrito, no vale rebajar a ojo. La idea de fondo: donde es probable el uso simultáneo, se cuenta todo; donde no lo es, se descuenta.</a:t>
             </a:r>
           </a:p>
         </p:txBody>
@@ -742,12 +743,12 @@
           <a:lstStyle/>
           <a:p>
             <a:r>
-              <a:t>N1: ¿Qué significa exactamente individualizar una instalación grande?</a:t>
-            </a:r>
-          </a:p>
-          <a:p>
-            <a:r>
-              <a:t>N2: Significa sacarla aparte para que no dependa del resto del edificio. Imagina un restaurante, una lavandería o la caldera común de un bloque: todo eso puede pasar de setenta kilovatios. No puede colgar en serie del mismo conjunto de regulación que los vecinos, como si fuera un piso más, porque el día que tengas que repararlo dejarías sin gas a todo el edificio. Así que se individualiza: se conecta aguas arriba, o sea antes del conjunto de regulación de las viviendas, con su propia derivación. Y muy importante, en esa derivación se ponen dos llaves, una a cada lado, para poder aislar esa instalación grande sin tocar la de los vecinos. Hecho así, el día que reparas el restaurante, cierras sus dos llaves y los vecinos ni se enteran. Hay una excepción para locales solo comerciales, que pueden compartir el conjunto de regulación y separarse aguas abajo con llaves accesibles, pero la regla general es aguas arriba.</a:t>
+              <a:t>N1: ¿Y cómo calculo lo que pide el edificio entero?</a:t>
+            </a:r>
+          </a:p>
+          <a:p>
+            <a:r>
+              <a:t>N2: Sumando lo de todas las viviendas y locales que cuelgan de la misma acometida, incluidos los pisos que todavía no tienen instalación pero podrían tenerla. A las viviendas les aplicas un factor de simultaneidad, que se llama ese ene, y a los locales los sumas aparte. La clave del factor es puro sentido común: cuanto más grande es el edificio, menos probable es que todos usen el gas a la vez, así que el factor baja. Para una sola vivienda vale uno, esa sola puede tenerlo todo encendido; para más de treinta viviendas se queda en quince centésimas. Y una regla que cae fijo: existen dos factores, uno sin calefacción y otro con calefacción, y el de con calefacción siempre es mayor, porque la calefacción tira mucho gas y hace más probable que coincidan usándolo. Menos viviendas o con calefacción, factor más alto; muchas viviendas y sin calefacción, factor más bajo.</a:t>
             </a:r>
           </a:p>
         </p:txBody>
@@ -817,12 +818,12 @@
           <a:lstStyle/>
           <a:p>
             <a:r>
-              <a:t>N1: Ya tengo la potencia. ¿Cómo paso a caudal?</a:t>
-            </a:r>
-          </a:p>
-          <a:p>
-            <a:r>
-              <a:t>N2: Con una división muy sencilla, y fíjate en el patrón porque siempre es el mismo: el caudal es la potencia dividida entre el Hache ese. La potencia, en kilovatios, es lo que pide la instalación; el Hache ese, el poder calorífico superior, es lo que entrega cada metro cúbico de gas. Si divides lo que pides entre lo que da cada metro cúbico, te sale cuántos metros cúbicos por hora tienes que mover. Y ese caudal es justo lo que necesitas para elegir el grosor del tubo. Lo haces igual para una vivienda, para el edificio o para un aparato suelto: siempre potencia entre Hache ese. Un aviso: si el gas se vende por peso, como el butano o el propano en kilos, entonces el caudal te sale en kilos por hora en vez de en metros cúbicos por hora. Pero la operación es la misma.</a:t>
+              <a:t>N1: ¿Qué significa exactamente individualizar una instalación grande?</a:t>
+            </a:r>
+          </a:p>
+          <a:p>
+            <a:r>
+              <a:t>N2: Significa sacarla aparte para que no dependa del resto del edificio. Imagina un restaurante, una lavandería o la caldera común de un bloque: todo eso puede pasar de setenta kilovatios. No puede colgar en serie del mismo conjunto de regulación que los vecinos, como si fuera un piso más, porque el día que tengas que repararlo dejarías sin gas a todo el edificio. Así que se individualiza: se conecta aguas arriba, o sea antes del conjunto de regulación de las viviendas, con su propia derivación. Y muy importante, en esa derivación se ponen dos llaves, una a cada lado, para poder aislar esa instalación grande sin tocar la de los vecinos. Hecho así, el día que reparas el restaurante, cierras sus dos llaves y los vecinos ni se enteran. Hay una excepción para locales solo comerciales, que pueden compartir el conjunto de regulación y separarse aguas abajo con llaves accesibles, pero la regla general es aguas arriba.</a:t>
             </a:r>
           </a:p>
         </p:txBody>
@@ -892,12 +893,12 @@
           <a:lstStyle/>
           <a:p>
             <a:r>
-              <a:t>N1: ¿Qué límites tengo que respetar al calcular?</a:t>
-            </a:r>
-          </a:p>
-          <a:p>
-            <a:r>
-              <a:t>N2: Dos, y los dos entran en el examen casi seguro. El primero es la velocidad del gas dentro del tubo: no puede pasar de veinte metros por segundo. ¿Por qué? Porque si el gas corre demasiado rápido, silba, vibra y arrastra la suciedad del tubo hacia el aparato. El segundo son las presiones mínimas en la llave del aparato: el gas natural necesita al menos diecisiete milibares, el butano veinte, el propano cuarenta y dos coma cinco cuando va a cincuenta, y veinticinco cuando va a treinta y siete. ¿Por qué mínimas? Porque si al aparato le llega menos presión de la que marca la tabla, no funciona bien: la caldera modula a la baja o se apaga, el calentador no calienta. Y si le falta presión, casi siempre es porque el tubo se quedó corto de diámetro o el gas va demasiado rápido. Por eso estos dos topes mandan sobre todo el cálculo.</a:t>
+              <a:t>N1: Ya tengo la potencia. ¿Cómo paso a caudal?</a:t>
+            </a:r>
+          </a:p>
+          <a:p>
+            <a:r>
+              <a:t>N2: Con una división muy sencilla, y fíjate en el patrón porque siempre es el mismo: el caudal es la potencia dividida entre el Hache ese. La potencia, en kilovatios, es lo que pide la instalación; el Hache ese, el poder calorífico superior, es lo que entrega cada metro cúbico de gas. Si divides lo que pides entre lo que da cada metro cúbico, te sale cuántos metros cúbicos por hora tienes que mover. Y ese caudal es justo lo que necesitas para elegir el grosor del tubo. Lo haces igual para una vivienda, para el edificio o para un aparato suelto: siempre potencia entre Hache ese. Un aviso: si el gas se vende por peso, como el butano o el propano en kilos, entonces el caudal te sale en kilos por hora en vez de en metros cúbicos por hora. Pero la operación es la misma.</a:t>
             </a:r>
           </a:p>
         </p:txBody>
@@ -967,12 +968,12 @@
           <a:lstStyle/>
           <a:p>
             <a:r>
-              <a:t>N1: Estos cálculos, ¿se quedan en mi libreta?</a:t>
-            </a:r>
-          </a:p>
-          <a:p>
-            <a:r>
-              <a:t>N2: No. Todo lo que has calculado tiene que quedar reflejado en papel. Si la instalación es de las que lo exigen por potencia o por tipo, va en un proyecto firmado por un técnico competente; en las más sencillas, basta con una memoria. Y cuando la obra está terminada, todo se plasma en el certificado de instalación de gas, el famoso modelo I erre ge, que firma la empresa instaladora habilitada y se entrega a la distribuidora antes de dar gas. La regla de oro es esta: el papel tiene que cuadrar con lo montado. Si has dimensionado una cosa y has instalado otra, ese certificado no deberías firmarlo, porque estás certificando algo que no es verdad. Lo que se firma, se responde.</a:t>
+              <a:t>N1: ¿Qué límites tengo que respetar al calcular?</a:t>
+            </a:r>
+          </a:p>
+          <a:p>
+            <a:r>
+              <a:t>N2: Dos, y los dos entran en el examen casi seguro. El primero es la velocidad del gas dentro del tubo: no puede pasar de veinte metros por segundo. ¿Por qué? Porque si el gas corre demasiado rápido, silba, vibra y arrastra la suciedad del tubo hacia el aparato. El segundo son las presiones mínimas en la llave del aparato: el gas natural necesita al menos diecisiete milibares, el butano veinte, el propano cuarenta y dos coma cinco cuando va a cincuenta, y veinticinco cuando va a treinta y siete. ¿Por qué mínimas? Porque si al aparato le llega menos presión de la que marca la tabla, no funciona bien: la caldera modula a la baja o se apaga, el calentador no calienta. Y si le falta presión, casi siempre es porque el tubo se quedó corto de diámetro o el gas va demasiado rápido. Por eso estos dos topes mandan sobre todo el cálculo.</a:t>
             </a:r>
           </a:p>
         </p:txBody>
@@ -1042,6 +1043,81 @@
           <a:lstStyle/>
           <a:p>
             <a:r>
+              <a:t>N1: Estos cálculos, ¿se quedan en mi libreta?</a:t>
+            </a:r>
+          </a:p>
+          <a:p>
+            <a:r>
+              <a:t>N2: No. Todo lo que has calculado tiene que quedar reflejado en papel. Si la instalación es de las que lo exigen por potencia o por tipo, va en un proyecto firmado por un técnico competente; en las más sencillas, basta con una memoria. Y cuando la obra está terminada, todo se plasma en el certificado de instalación de gas, el famoso modelo I erre ge, que firma la empresa instaladora habilitada y se entrega a la distribuidora antes de dar gas. La regla de oro es esta: el papel tiene que cuadrar con lo montado. Si has dimensionado una cosa y has instalado otra, ese certificado no deberías firmarlo, porque estás certificando algo que no es verdad. Lo que se firma, se responde.</a:t>
+            </a:r>
+          </a:p>
+        </p:txBody>
+      </p:sp>
+      <p:sp>
+        <p:nvSpPr>
+          <p:cNvPr id="4" name="Slide Number Placeholder 3"/>
+          <p:cNvSpPr>
+            <a:spLocks noGrp="1"/>
+          </p:cNvSpPr>
+          <p:nvPr>
+            <p:ph type="sldNum" idx="5" sz="quarter"/>
+          </p:nvPr>
+        </p:nvSpPr>
+        <p:spPr/>
+      </p:sp>
+    </p:spTree>
+  </p:cSld>
+  <p:clrMapOvr>
+    <a:masterClrMapping/>
+  </p:clrMapOvr>
+</p:notes>
+</file>
+
+<file path=ppt/notesSlides/notesSlide17.xml><?xml version="1.0" encoding="utf-8"?>
+<p:notes xmlns:a="http://schemas.openxmlformats.org/drawingml/2006/main" xmlns:p="http://schemas.openxmlformats.org/presentationml/2006/main" xmlns:r="http://schemas.openxmlformats.org/officeDocument/2006/relationships">
+  <p:cSld>
+    <p:spTree>
+      <p:nvGrpSpPr>
+        <p:cNvPr id="1" name=""/>
+        <p:cNvGrpSpPr/>
+        <p:nvPr/>
+      </p:nvGrpSpPr>
+      <p:grpSpPr>
+        <a:xfrm>
+          <a:off x="0" y="0"/>
+          <a:ext cx="0" cy="0"/>
+          <a:chOff x="0" y="0"/>
+          <a:chExt cx="0" cy="0"/>
+        </a:xfrm>
+      </p:grpSpPr>
+      <p:sp>
+        <p:nvSpPr>
+          <p:cNvPr id="2" name="Slide Image Placeholder 1"/>
+          <p:cNvSpPr>
+            <a:spLocks noGrp="1"/>
+          </p:cNvSpPr>
+          <p:nvPr>
+            <p:ph type="sldImg" idx="2"/>
+          </p:nvPr>
+        </p:nvSpPr>
+        <p:spPr/>
+      </p:sp>
+      <p:sp>
+        <p:nvSpPr>
+          <p:cNvPr id="3" name="Notes Placeholder 2"/>
+          <p:cNvSpPr>
+            <a:spLocks noGrp="1"/>
+          </p:cNvSpPr>
+          <p:nvPr>
+            <p:ph type="body" idx="3" sz="quarter"/>
+          </p:nvPr>
+        </p:nvSpPr>
+        <p:spPr/>
+        <p:txBody>
+          <a:bodyPr/>
+          <a:lstStyle/>
+          <a:p>
+            <a:r>
               <a:t>N1: Vale, ha sido denso. Si me quedo con lo esencial, ¿qué es?</a:t>
             </a:r>
           </a:p>
@@ -1200,16 +1276,7 @@
         <p:txBody>
           <a:bodyPr/>
           <a:lstStyle/>
-          <a:p>
-            <a:r>
-              <a:t>N1: ¿Qué cubre exactamente esta norma?</a:t>
-            </a:r>
-          </a:p>
-          <a:p>
-            <a:r>
-              <a:t>N2: Vamos por partes. Una instalación receptora es todo el recorrido del gas desde que entra en la propiedad hasta el aparato que lo quema: la caldera, el calentador, la cocina. La UNE sesenta mil seiscientos setenta es el libro de instrucciones de esas instalaciones cuando trabajan a presión baja, hasta cinco bar como máximo. Y no solo dice cómo montarlas: fija los criterios técnicos, los requisitos de seguridad y las garantías de buen servicio para todo el ciclo de vida, o sea diseñar, construir, ampliar, modificar, probar, poner en servicio y revisar de forma periódica. La palabra clave es MOP, que es la máxima presión a la que puede trabajar la instalación: si es igual o menor que cinco bar, esta es tu norma. Un ejemplo: la instalación de gas natural de un piso normal va a unos veinte milibares; eso es muchísimo menos de cinco bar, así que cae de lleno aquí dentro.</a:t>
-            </a:r>
-          </a:p>
+          <a:p/>
         </p:txBody>
       </p:sp>
       <p:sp>
@@ -1277,12 +1344,12 @@
           <a:lstStyle/>
           <a:p>
             <a:r>
-              <a:t>N1: ¿Y por qué está partida en tantos trozos?</a:t>
-            </a:r>
-          </a:p>
-          <a:p>
-            <a:r>
-              <a:t>N2: Porque cada fase de la vida de una instalación tiene su propio cuaderno. La norma completa son trece partes. La uno y la dos son generalidades y vocabulario; la tres te dice con qué materiales trabajas, o sea tubos, accesorios y uniones; y la cuatro, que es la nuestra, te dice cómo diseñarla y montarla. Luego siguen las demás: la cinco de los cuartos de contadores, la seis de la ventilación de los locales con aparatos, la ocho de las pruebas de estanquidad, la nueve de la puesta en servicio, y así hasta la trece, que va del control periódico de los aparatos. ¿Para qué te sirve saber esto en el examen? Para colocar cada pregunta en su sitio: si te preguntan por la distancia de un tubo, es la Parte cuatro; si te preguntan por una prueba de estanquidad, es la Parte ocho. Sitúas la pregunta y aciertas.</a:t>
+              <a:t>N1: ¿Qué cubre exactamente esta norma?</a:t>
+            </a:r>
+          </a:p>
+          <a:p>
+            <a:r>
+              <a:t>N2: Vamos por partes. Una instalación receptora es todo el recorrido del gas desde que entra en la propiedad hasta el aparato que lo quema: la caldera, el calentador, la cocina. La UNE sesenta mil seiscientos setenta es el libro de instrucciones de esas instalaciones cuando trabajan a presión baja, hasta cinco bar como máximo. Y no solo dice cómo montarlas: fija los criterios técnicos, los requisitos de seguridad y las garantías de buen servicio para todo el ciclo de vida, o sea diseñar, construir, ampliar, modificar, probar, poner en servicio y revisar de forma periódica. La palabra clave es MOP, que es la máxima presión a la que puede trabajar la instalación: si es igual o menor que cinco bar, esta es tu norma. Un ejemplo: la instalación de gas natural de un piso normal va a unos veinte milibares; eso es muchísimo menos de cinco bar, así que cae de lleno aquí dentro.</a:t>
             </a:r>
           </a:p>
         </p:txBody>
@@ -1352,12 +1419,12 @@
           <a:lstStyle/>
           <a:p>
             <a:r>
-              <a:t>N1: Vale, ¿y qué hace la Parte cuatro que no hagan las demás?</a:t>
-            </a:r>
-          </a:p>
-          <a:p>
-            <a:r>
-              <a:t>N2: La Parte cuatro responde a dos preguntas muy concretas de obra: cómo monto el tubo y por dónde lo llevo. Piénsalo con una analogía: la Parte tres es la ferretería, te dice qué tubos y qué accesorios existen; la Parte cuatro es el plano de la casa, te dice cómo colocarlos y por dónde pasarlos. Cuando en obra dudes, por ejemplo si puede ir un tubo por un sitio o qué distancia dejas con la luz, la respuesta está en la Parte cuatro. Este primer vídeo es solo la mitad de esa parte: la mitad de cálculo, echar números. El trazado, o sea el por dónde, lo vemos en el vídeo siguiente. Hoy nos quedamos con la calculadora.</a:t>
+              <a:t>N1: ¿Y por qué está partida en tantos trozos?</a:t>
+            </a:r>
+          </a:p>
+          <a:p>
+            <a:r>
+              <a:t>N2: Porque cada fase de la vida de una instalación tiene su propio cuaderno. La norma completa son trece partes. La uno y la dos son generalidades y vocabulario; la tres te dice con qué materiales trabajas, o sea tubos, accesorios y uniones; y la cuatro, que es la nuestra, te dice cómo diseñarla y montarla. Luego siguen las demás: la cinco de los cuartos de contadores, la seis de la ventilación de los locales con aparatos, la ocho de las pruebas de estanquidad, la nueve de la puesta en servicio, y así hasta la trece, que va del control periódico de los aparatos. ¿Para qué te sirve saber esto en el examen? Para colocar cada pregunta en su sitio: si te preguntan por la distancia de un tubo, es la Parte cuatro; si te preguntan por una prueba de estanquidad, es la Parte ocho. Sitúas la pregunta y aciertas.</a:t>
             </a:r>
           </a:p>
         </p:txBody>
@@ -1427,12 +1494,12 @@
           <a:lstStyle/>
           <a:p>
             <a:r>
-              <a:t>N1: ¿Merece la pena fijarse en las novedades?</a:t>
-            </a:r>
-          </a:p>
-          <a:p>
-            <a:r>
-              <a:t>N2: Sí, porque los cambios de una edición a otra son justo lo que más se pregunta: el examinador va a lo nuevo. Te adelanto los que más caen. Uno: las instalaciones de más de setenta kilovatios hay que individualizarlas, es decir, sacarlas aparte del resto, y ahora la norma explica cómo. Dos: aclara que una tubería empotrada es la que va metida directamente en la pared sin vaina; si lleva vaina, ya no es empotrada, es envainada. Tres: si no puedes dejar los tres centímetros de separación con la luz o el agua, puedes acercar el tubo si lo aíslas con una coquilla. Y hay más, como que ahora se admite el press-fitting dentro de vainas, o que el regulador con válvula de alivio por dentro necesita ventilación permanente. No te agobies memorizándolas todas hoy; quédate con que existen y las iremos viendo en su sitio.</a:t>
+              <a:t>N1: Vale, ¿y qué hace la Parte cuatro que no hagan las demás?</a:t>
+            </a:r>
+          </a:p>
+          <a:p>
+            <a:r>
+              <a:t>N2: La Parte cuatro responde a dos preguntas muy concretas de obra: cómo monto el tubo y por dónde lo llevo. Piénsalo con una analogía: la Parte tres es la ferretería, te dice qué tubos y qué accesorios existen; la Parte cuatro es el plano de la casa, te dice cómo colocarlos y por dónde pasarlos. Cuando en obra dudes, por ejemplo si puede ir un tubo por un sitio o qué distancia dejas con la luz, la respuesta está en la Parte cuatro. Este primer vídeo es solo la mitad de esa parte: la mitad de cálculo, echar números. El trazado, o sea el por dónde, lo vemos en el vídeo siguiente. Hoy nos quedamos con la calculadora.</a:t>
             </a:r>
           </a:p>
         </p:txBody>
@@ -1502,12 +1569,12 @@
           <a:lstStyle/>
           <a:p>
             <a:r>
-              <a:t>N1: Antes de calcular, ¿qué necesito tener sobre la mesa?</a:t>
-            </a:r>
-          </a:p>
-          <a:p>
-            <a:r>
-              <a:t>N2: Necesitas siete datos, y esto es importante: no te los inventas ni los mides tú, te los da por escrito la compañía distribuidora. Son la ficha técnica del suministro. ¿Cuáles son? La familia y el nombre del gas; el poder calorífico superior, que se llama Hache ese y es la energía que da cada metro cúbico de gas; las densidades del gas; el índice de Wobbe; la presión garantizada a la salida de la llave de acometida; el rango de presiones dentro de la instalación; y el diámetro de la llave de acometida. Sin estos datos no puedes calcular ni un diámetro, porque calcular es siempre relacionar lo que pide la instalación con lo que entrega el gas, y lo que entrega el gas está en esos datos. Un detalle que cae: si en tu zona está previsto cambiar de gas, por ejemplo pasar de propano a gas natural, la instalación tiene que valer para los dos, para no rehacerla el día del cambio.</a:t>
+              <a:t>N1: ¿Merece la pena fijarse en las novedades?</a:t>
+            </a:r>
+          </a:p>
+          <a:p>
+            <a:r>
+              <a:t>N2: Sí, porque los cambios de una edición a otra son justo lo que más se pregunta: el examinador va a lo nuevo. Te adelanto los que más caen. Uno: las instalaciones de más de setenta kilovatios hay que individualizarlas, es decir, sacarlas aparte del resto, y ahora la norma explica cómo. Dos: aclara que una tubería empotrada es la que va metida directamente en la pared sin vaina; si lleva vaina, ya no es empotrada, es envainada. Tres: si no puedes dejar los tres centímetros de separación con la luz o el agua, puedes acercar el tubo si lo aíslas con una coquilla. Y hay más, como que ahora se admite el press-fitting dentro de vainas, o que el regulador con válvula de alivio por dentro necesita ventilación permanente. No te agobies memorizándolas todas hoy; quédate con que existen y las iremos viendo en su sitio.</a:t>
             </a:r>
           </a:p>
         </p:txBody>
@@ -1577,12 +1644,12 @@
           <a:lstStyle/>
           <a:p>
             <a:r>
-              <a:t>N1: ¿Qué es eso del grado de gasificación?</a:t>
-            </a:r>
-          </a:p>
-          <a:p>
-            <a:r>
-              <a:t>N2: Es una etiqueta según la potencia que va a tener la instalación de una vivienda o local. Solo tienes que memorizar dos números: treinta y setenta kilovatios. Hasta treinta, grado uno; entre treinta y setenta, grado dos; por encima de setenta, grado tres. Nada más. La potencia, recuerda, es cuánto gas es capaz de quemar la instalación cuando está a tope. ¿Por qué importa el grado? Porque marca cómo tratas la instalación: cuanto más grande, más exigencias. Y guárdate bien el setenta, porque reaparece enseguida: las instalaciones de más de setenta kilovatios hay que individualizarlas, sacarlas aparte. El treinta y el setenta caen muchísimo, así que que no se te olviden.</a:t>
+              <a:t>N1: Antes de calcular, ¿qué necesito tener sobre la mesa?</a:t>
+            </a:r>
+          </a:p>
+          <a:p>
+            <a:r>
+              <a:t>N2: Necesitas siete datos, y esto es importante: no te los inventas ni los mides tú, te los da por escrito la compañía distribuidora. Son la ficha técnica del suministro. ¿Cuáles son? La familia y el nombre del gas; el poder calorífico superior, que se llama Hache ese y es la energía que da cada metro cúbico de gas; las densidades del gas; el índice de Wobbe; la presión garantizada a la salida de la llave de acometida; el rango de presiones dentro de la instalación; y el diámetro de la llave de acometida. Sin estos datos no puedes calcular ni un diámetro, porque calcular es siempre relacionar lo que pide la instalación con lo que entrega el gas, y lo que entrega el gas está en esos datos. Un detalle que cae: si en tu zona está previsto cambiar de gas, por ejemplo pasar de propano a gas natural, la instalación tiene que valer para los dos, para no rehacerla el día del cambio.</a:t>
             </a:r>
           </a:p>
         </p:txBody>
@@ -1652,12 +1719,12 @@
           <a:lstStyle/>
           <a:p>
             <a:r>
-              <a:t>N1: ¿Cómo calculo la potencia de una vivienda?</a:t>
-            </a:r>
-          </a:p>
-          <a:p>
-            <a:r>
-              <a:t>N2: Con un truco muy lógico. En una casa no todos los aparatos pesan igual, porque es rarísimo que enciendas todo a la vez. Así que la fórmula lo tiene en cuenta: los dos aparatos que más consumen, normalmente la caldera y la cocina, o la caldera y el calentador, cuentan enteros. El resto de aparatos, los secundarios, se dividen entre dos, porque casi nunca coinciden todos funcionando. Sumas eso y lo multiplicas por uno coma diez, que es un pequeño coeficiente corrector del gas. Y una regla de oro: pase lo que pase, nunca bajes de treinta kilovatios, que es el suelo obligatorio del grado uno. Aunque te salga menos, pones treinta. Ejemplo: una vivienda con caldera y cocina cuenta esos dos enteros; si además tiene un calentador auxiliar, ese va a la mitad.</a:t>
+              <a:t>N1: ¿Qué es eso del grado de gasificación?</a:t>
+            </a:r>
+          </a:p>
+          <a:p>
+            <a:r>
+              <a:t>N2: Es una etiqueta según la potencia que va a tener la instalación de una vivienda o local. Solo tienes que memorizar dos números: treinta y setenta kilovatios. Hasta treinta, grado uno; entre treinta y setenta, grado dos; por encima de setenta, grado tres. Nada más. La potencia, recuerda, es cuánto gas es capaz de quemar la instalación cuando está a tope. ¿Por qué importa el grado? Porque marca cómo tratas la instalación: cuanto más grande, más exigencias. Y guárdate bien el setenta, porque reaparece enseguida: las instalaciones de más de setenta kilovatios hay que individualizarlas, sacarlas aparte. El treinta y el setenta caen muchísimo, así que que no se te olviden.</a:t>
             </a:r>
           </a:p>
         </p:txBody>
@@ -4732,7 +4799,7 @@
             <a:r>
               <a:rPr sz="1400" b="1" i="0">
                 <a:solidFill>
-                  <a:srgbClr val="CADCFC"/>
+                  <a:srgbClr val="F4A24C"/>
                 </a:solidFill>
                 <a:latin typeface="Montserrat"/>
               </a:rPr>
@@ -4743,13 +4810,57 @@
       </p:sp>
       <p:sp>
         <p:nvSpPr>
-          <p:cNvPr id="4" name="TextBox 3"/>
+          <p:cNvPr id="4" name="Rounded Rectangle 3"/>
+          <p:cNvSpPr/>
+          <p:nvPr/>
+        </p:nvSpPr>
+        <p:spPr>
+          <a:xfrm>
+            <a:off x="868680" y="2057400"/>
+            <a:ext cx="1463040" cy="82296"/>
+          </a:xfrm>
+          <a:prstGeom prst="roundRect">
+            <a:avLst/>
+          </a:prstGeom>
+          <a:solidFill>
+            <a:srgbClr val="E8801A"/>
+          </a:solidFill>
+          <a:ln>
+            <a:noFill/>
+          </a:ln>
+          <a:effectLst/>
+        </p:spPr>
+        <p:style>
+          <a:lnRef idx="1">
+            <a:schemeClr val="accent1"/>
+          </a:lnRef>
+          <a:fillRef idx="3">
+            <a:schemeClr val="accent1"/>
+          </a:fillRef>
+          <a:effectRef idx="2">
+            <a:schemeClr val="accent1"/>
+          </a:effectRef>
+          <a:fontRef idx="minor">
+            <a:schemeClr val="lt1"/>
+          </a:fontRef>
+        </p:style>
+        <p:txBody>
+          <a:bodyPr rtlCol="0" anchor="ctr"/>
+          <a:lstStyle/>
+          <a:p>
+            <a:pPr algn="ctr"/>
+          </a:p>
+        </p:txBody>
+      </p:sp>
+      <p:sp>
+        <p:nvSpPr>
+          <p:cNvPr id="5" name="TextBox 4"/>
           <p:cNvSpPr txBox="1"/>
           <p:nvPr/>
         </p:nvSpPr>
         <p:spPr>
           <a:xfrm>
-            <a:off x="822960" y="2194560"/>
+            <a:off x="822960" y="2286000"/>
             <a:ext cx="10515600" cy="2011680"/>
           </a:xfrm>
           <a:prstGeom prst="rect">
@@ -4788,7 +4899,7 @@
       </p:sp>
       <p:sp>
         <p:nvSpPr>
-          <p:cNvPr id="5" name="TextBox 4"/>
+          <p:cNvPr id="6" name="TextBox 5"/>
           <p:cNvSpPr txBox="1"/>
           <p:nvPr/>
         </p:nvSpPr>
@@ -4912,7 +5023,7 @@
                 </a:solidFill>
                 <a:latin typeface="Montserrat"/>
               </a:rPr>
-              <a:t>010 / 016</a:t>
+              <a:t>010 / 017</a:t>
             </a:r>
           </a:p>
         </p:txBody>
@@ -4960,7 +5071,7 @@
         <p:spPr>
           <a:xfrm>
             <a:off x="822960" y="457200"/>
-            <a:ext cx="8229600" cy="365760"/>
+            <a:ext cx="10058400" cy="365760"/>
           </a:xfrm>
           <a:prstGeom prst="rect">
             <a:avLst/>
@@ -4974,13 +5085,13 @@
           <a:lstStyle/>
           <a:p>
             <a:r>
-              <a:rPr sz="1200" b="1" i="0">
-                <a:solidFill>
-                  <a:srgbClr val="64748B"/>
-                </a:solidFill>
-                <a:latin typeface="Montserrat"/>
-              </a:rPr>
-              <a:t>APARTADO 3.2 · LOCAL NO DOMÉSTICO</a:t>
+              <a:rPr sz="1300" b="1" i="0">
+                <a:solidFill>
+                  <a:srgbClr val="E8801A"/>
+                </a:solidFill>
+                <a:latin typeface="Montserrat"/>
+              </a:rPr>
+              <a:t>APARTADO 3.2 · POTENCIA DE LA VIVIENDA</a:t>
             </a:r>
           </a:p>
         </p:txBody>
@@ -5008,26 +5119,70 @@
           <a:lstStyle/>
           <a:p>
             <a:r>
-              <a:rPr sz="2700" b="1" i="0">
+              <a:rPr sz="2800" b="1" i="0">
                 <a:solidFill>
                   <a:srgbClr val="1E2761"/>
                 </a:solidFill>
                 <a:latin typeface="Montserrat"/>
               </a:rPr>
-              <a:t>En un local, se suma todo</a:t>
-            </a:r>
-          </a:p>
-        </p:txBody>
-      </p:sp>
-      <p:sp>
-        <p:nvSpPr>
-          <p:cNvPr id="7" name="TextBox 6"/>
+              <a:t>Los dos aparatos grandes, enteros</a:t>
+            </a:r>
+          </a:p>
+        </p:txBody>
+      </p:sp>
+      <p:sp>
+        <p:nvSpPr>
+          <p:cNvPr id="7" name="Rounded Rectangle 6"/>
+          <p:cNvSpPr/>
+          <p:nvPr/>
+        </p:nvSpPr>
+        <p:spPr>
+          <a:xfrm>
+            <a:off x="868680" y="1627632"/>
+            <a:ext cx="2011680" cy="73152"/>
+          </a:xfrm>
+          <a:prstGeom prst="roundRect">
+            <a:avLst/>
+          </a:prstGeom>
+          <a:solidFill>
+            <a:srgbClr val="E8801A"/>
+          </a:solidFill>
+          <a:ln>
+            <a:noFill/>
+          </a:ln>
+          <a:effectLst/>
+        </p:spPr>
+        <p:style>
+          <a:lnRef idx="1">
+            <a:schemeClr val="accent1"/>
+          </a:lnRef>
+          <a:fillRef idx="3">
+            <a:schemeClr val="accent1"/>
+          </a:fillRef>
+          <a:effectRef idx="2">
+            <a:schemeClr val="accent1"/>
+          </a:effectRef>
+          <a:fontRef idx="minor">
+            <a:schemeClr val="lt1"/>
+          </a:fontRef>
+        </p:style>
+        <p:txBody>
+          <a:bodyPr rtlCol="0" anchor="ctr"/>
+          <a:lstStyle/>
+          <a:p>
+            <a:pPr algn="ctr"/>
+          </a:p>
+        </p:txBody>
+      </p:sp>
+      <p:sp>
+        <p:nvSpPr>
+          <p:cNvPr id="8" name="TextBox 7"/>
           <p:cNvSpPr txBox="1"/>
           <p:nvPr/>
         </p:nvSpPr>
         <p:spPr>
           <a:xfrm>
-            <a:off x="822960" y="1920240"/>
+            <a:off x="822960" y="1965960"/>
             <a:ext cx="4983480" cy="4206240"/>
           </a:xfrm>
           <a:prstGeom prst="rect">
@@ -5043,17 +5198,17 @@
           <a:p>
             <a:pPr>
               <a:spcAft>
-                <a:spcPts val="1000"/>
+                <a:spcPts val="1100"/>
               </a:spcAft>
             </a:pPr>
             <a:r>
               <a:rPr sz="1600" b="1" i="0">
                 <a:solidFill>
-                  <a:srgbClr val="2E3A80"/>
-                </a:solidFill>
-                <a:latin typeface="Montserrat"/>
-              </a:rPr>
-              <a:t>•  </a:t>
+                  <a:srgbClr val="E8801A"/>
+                </a:solidFill>
+                <a:latin typeface="Montserrat"/>
+              </a:rPr>
+              <a:t>▸  </a:t>
             </a:r>
             <a:r>
               <a:rPr sz="1600" b="0" i="0">
@@ -5062,23 +5217,23 @@
                 </a:solidFill>
                 <a:latin typeface="Montserrat"/>
               </a:rPr>
-              <a:t>Suma de todos los consumos</a:t>
+              <a:t>Los dos mayores cuentan enteros</a:t>
             </a:r>
           </a:p>
           <a:p>
             <a:pPr>
               <a:spcAft>
-                <a:spcPts val="1000"/>
+                <a:spcPts val="1100"/>
               </a:spcAft>
             </a:pPr>
             <a:r>
               <a:rPr sz="1600" b="1" i="0">
                 <a:solidFill>
-                  <a:srgbClr val="2E3A80"/>
-                </a:solidFill>
-                <a:latin typeface="Montserrat"/>
-              </a:rPr>
-              <a:t>•  </a:t>
+                  <a:srgbClr val="E8801A"/>
+                </a:solidFill>
+                <a:latin typeface="Montserrat"/>
+              </a:rPr>
+              <a:t>▸  </a:t>
             </a:r>
             <a:r>
               <a:rPr sz="1600" b="0" i="0">
@@ -5087,23 +5242,23 @@
                 </a:solidFill>
                 <a:latin typeface="Montserrat"/>
               </a:rPr>
-              <a:t>Multiplicado por 1,10</a:t>
+              <a:t>El resto, dividido entre 2</a:t>
             </a:r>
           </a:p>
           <a:p>
             <a:pPr>
               <a:spcAft>
-                <a:spcPts val="1000"/>
+                <a:spcPts val="1100"/>
               </a:spcAft>
             </a:pPr>
             <a:r>
               <a:rPr sz="1600" b="1" i="0">
                 <a:solidFill>
-                  <a:srgbClr val="2E3A80"/>
-                </a:solidFill>
-                <a:latin typeface="Montserrat"/>
-              </a:rPr>
-              <a:t>•  </a:t>
+                  <a:srgbClr val="E8801A"/>
+                </a:solidFill>
+                <a:latin typeface="Montserrat"/>
+              </a:rPr>
+              <a:t>▸  </a:t>
             </a:r>
             <a:r>
               <a:rPr sz="1600" b="0" i="0">
@@ -5112,14 +5267,14 @@
                 </a:solidFill>
                 <a:latin typeface="Montserrat"/>
               </a:rPr>
-              <a:t>Simultaneidad solo si se justifica</a:t>
-            </a:r>
-          </a:p>
-        </p:txBody>
-      </p:sp>
-      <p:sp>
-        <p:nvSpPr>
-          <p:cNvPr id="8" name="imgph" descr="IMGQ:commercial kitchen gas range restaurant"/>
+              <a:t>Mínimo obligatorio: 30 kW</a:t>
+            </a:r>
+          </a:p>
+        </p:txBody>
+      </p:sp>
+      <p:sp>
+        <p:nvSpPr>
+          <p:cNvPr id="9" name="imgph" descr="IMGQ:kitchen with gas cooker and wall boiler"/>
           <p:cNvSpPr/>
           <p:nvPr/>
         </p:nvSpPr>
@@ -5165,7 +5320,7 @@
       </p:sp>
       <p:sp>
         <p:nvSpPr>
-          <p:cNvPr id="9" name="TextBox 8"/>
+          <p:cNvPr id="10" name="TextBox 9"/>
           <p:cNvSpPr txBox="1"/>
           <p:nvPr/>
         </p:nvSpPr>
@@ -5205,7 +5360,7 @@
                 </a:solidFill>
                 <a:latin typeface="Montserrat"/>
               </a:rPr>
-              <a:t>commercial kitchen gas range restaurant</a:t>
+              <a:t>kitchen with gas cooker and wall boiler</a:t>
             </a:r>
           </a:p>
         </p:txBody>
@@ -5302,7 +5457,7 @@
                 </a:solidFill>
                 <a:latin typeface="Montserrat"/>
               </a:rPr>
-              <a:t>011 / 016</a:t>
+              <a:t>011 / 017</a:t>
             </a:r>
           </a:p>
         </p:txBody>
@@ -5350,7 +5505,7 @@
         <p:spPr>
           <a:xfrm>
             <a:off x="822960" y="457200"/>
-            <a:ext cx="8229600" cy="365760"/>
+            <a:ext cx="10058400" cy="365760"/>
           </a:xfrm>
           <a:prstGeom prst="rect">
             <a:avLst/>
@@ -5364,13 +5519,13 @@
           <a:lstStyle/>
           <a:p>
             <a:r>
-              <a:rPr sz="1200" b="1" i="0">
-                <a:solidFill>
-                  <a:srgbClr val="64748B"/>
-                </a:solidFill>
-                <a:latin typeface="Montserrat"/>
-              </a:rPr>
-              <a:t>APARTADO 3.3 · POTENCIA COMÚN</a:t>
+              <a:rPr sz="1300" b="1" i="0">
+                <a:solidFill>
+                  <a:srgbClr val="E8801A"/>
+                </a:solidFill>
+                <a:latin typeface="Montserrat"/>
+              </a:rPr>
+              <a:t>APARTADO 3.2 · LOCAL NO DOMÉSTICO</a:t>
             </a:r>
           </a:p>
         </p:txBody>
@@ -5398,26 +5553,70 @@
           <a:lstStyle/>
           <a:p>
             <a:r>
-              <a:rPr sz="2700" b="1" i="0">
+              <a:rPr sz="2800" b="1" i="0">
                 <a:solidFill>
                   <a:srgbClr val="1E2761"/>
                 </a:solidFill>
                 <a:latin typeface="Montserrat"/>
               </a:rPr>
-              <a:t>El edificio entero: la potencia Pc</a:t>
-            </a:r>
-          </a:p>
-        </p:txBody>
-      </p:sp>
-      <p:sp>
-        <p:nvSpPr>
-          <p:cNvPr id="7" name="TextBox 6"/>
+              <a:t>En un local, se suma todo</a:t>
+            </a:r>
+          </a:p>
+        </p:txBody>
+      </p:sp>
+      <p:sp>
+        <p:nvSpPr>
+          <p:cNvPr id="7" name="Rounded Rectangle 6"/>
+          <p:cNvSpPr/>
+          <p:nvPr/>
+        </p:nvSpPr>
+        <p:spPr>
+          <a:xfrm>
+            <a:off x="868680" y="1627632"/>
+            <a:ext cx="2011680" cy="73152"/>
+          </a:xfrm>
+          <a:prstGeom prst="roundRect">
+            <a:avLst/>
+          </a:prstGeom>
+          <a:solidFill>
+            <a:srgbClr val="E8801A"/>
+          </a:solidFill>
+          <a:ln>
+            <a:noFill/>
+          </a:ln>
+          <a:effectLst/>
+        </p:spPr>
+        <p:style>
+          <a:lnRef idx="1">
+            <a:schemeClr val="accent1"/>
+          </a:lnRef>
+          <a:fillRef idx="3">
+            <a:schemeClr val="accent1"/>
+          </a:fillRef>
+          <a:effectRef idx="2">
+            <a:schemeClr val="accent1"/>
+          </a:effectRef>
+          <a:fontRef idx="minor">
+            <a:schemeClr val="lt1"/>
+          </a:fontRef>
+        </p:style>
+        <p:txBody>
+          <a:bodyPr rtlCol="0" anchor="ctr"/>
+          <a:lstStyle/>
+          <a:p>
+            <a:pPr algn="ctr"/>
+          </a:p>
+        </p:txBody>
+      </p:sp>
+      <p:sp>
+        <p:nvSpPr>
+          <p:cNvPr id="8" name="TextBox 7"/>
           <p:cNvSpPr txBox="1"/>
           <p:nvPr/>
         </p:nvSpPr>
         <p:spPr>
           <a:xfrm>
-            <a:off x="822960" y="1920240"/>
+            <a:off x="822960" y="1965960"/>
             <a:ext cx="4983480" cy="4206240"/>
           </a:xfrm>
           <a:prstGeom prst="rect">
@@ -5433,17 +5632,17 @@
           <a:p>
             <a:pPr>
               <a:spcAft>
-                <a:spcPts val="1000"/>
+                <a:spcPts val="1100"/>
               </a:spcAft>
             </a:pPr>
             <a:r>
               <a:rPr sz="1600" b="1" i="0">
                 <a:solidFill>
-                  <a:srgbClr val="2E3A80"/>
-                </a:solidFill>
-                <a:latin typeface="Montserrat"/>
-              </a:rPr>
-              <a:t>•  </a:t>
+                  <a:srgbClr val="E8801A"/>
+                </a:solidFill>
+                <a:latin typeface="Montserrat"/>
+              </a:rPr>
+              <a:t>▸  </a:t>
             </a:r>
             <a:r>
               <a:rPr sz="1600" b="0" i="0">
@@ -5452,23 +5651,23 @@
                 </a:solidFill>
                 <a:latin typeface="Montserrat"/>
               </a:rPr>
-              <a:t>Pc = Sn × ΣPiv + ΣPil</a:t>
+              <a:t>Suma de todos los consumos</a:t>
             </a:r>
           </a:p>
           <a:p>
             <a:pPr>
               <a:spcAft>
-                <a:spcPts val="1000"/>
+                <a:spcPts val="1100"/>
               </a:spcAft>
             </a:pPr>
             <a:r>
               <a:rPr sz="1600" b="1" i="0">
                 <a:solidFill>
-                  <a:srgbClr val="2E3A80"/>
-                </a:solidFill>
-                <a:latin typeface="Montserrat"/>
-              </a:rPr>
-              <a:t>•  </a:t>
+                  <a:srgbClr val="E8801A"/>
+                </a:solidFill>
+                <a:latin typeface="Montserrat"/>
+              </a:rPr>
+              <a:t>▸  </a:t>
             </a:r>
             <a:r>
               <a:rPr sz="1600" b="0" i="0">
@@ -5477,23 +5676,23 @@
                 </a:solidFill>
                 <a:latin typeface="Montserrat"/>
               </a:rPr>
-              <a:t>Más viviendas, menos simultaneidad</a:t>
+              <a:t>Multiplicado por 1,10</a:t>
             </a:r>
           </a:p>
           <a:p>
             <a:pPr>
               <a:spcAft>
-                <a:spcPts val="1000"/>
+                <a:spcPts val="1100"/>
               </a:spcAft>
             </a:pPr>
             <a:r>
               <a:rPr sz="1600" b="1" i="0">
                 <a:solidFill>
-                  <a:srgbClr val="2E3A80"/>
-                </a:solidFill>
-                <a:latin typeface="Montserrat"/>
-              </a:rPr>
-              <a:t>•  </a:t>
+                  <a:srgbClr val="E8801A"/>
+                </a:solidFill>
+                <a:latin typeface="Montserrat"/>
+              </a:rPr>
+              <a:t>▸  </a:t>
             </a:r>
             <a:r>
               <a:rPr sz="1600" b="0" i="0">
@@ -5502,14 +5701,14 @@
                 </a:solidFill>
                 <a:latin typeface="Montserrat"/>
               </a:rPr>
-              <a:t>Con calefacción, el factor sube</a:t>
-            </a:r>
-          </a:p>
-        </p:txBody>
-      </p:sp>
-      <p:sp>
-        <p:nvSpPr>
-          <p:cNvPr id="8" name="imgph" descr="IMGQ:apartment building gas riser pipes"/>
+              <a:t>Simultaneidad solo si se justifica</a:t>
+            </a:r>
+          </a:p>
+        </p:txBody>
+      </p:sp>
+      <p:sp>
+        <p:nvSpPr>
+          <p:cNvPr id="9" name="imgph" descr="IMGQ:commercial kitchen gas range restaurant"/>
           <p:cNvSpPr/>
           <p:nvPr/>
         </p:nvSpPr>
@@ -5555,7 +5754,7 @@
       </p:sp>
       <p:sp>
         <p:nvSpPr>
-          <p:cNvPr id="9" name="TextBox 8"/>
+          <p:cNvPr id="10" name="TextBox 9"/>
           <p:cNvSpPr txBox="1"/>
           <p:nvPr/>
         </p:nvSpPr>
@@ -5595,7 +5794,7 @@
                 </a:solidFill>
                 <a:latin typeface="Montserrat"/>
               </a:rPr>
-              <a:t>apartment building gas riser pipes</a:t>
+              <a:t>commercial kitchen gas range restaurant</a:t>
             </a:r>
           </a:p>
         </p:txBody>
@@ -5692,7 +5891,7 @@
                 </a:solidFill>
                 <a:latin typeface="Montserrat"/>
               </a:rPr>
-              <a:t>012 / 016</a:t>
+              <a:t>012 / 017</a:t>
             </a:r>
           </a:p>
         </p:txBody>
@@ -5740,7 +5939,7 @@
         <p:spPr>
           <a:xfrm>
             <a:off x="822960" y="457200"/>
-            <a:ext cx="8229600" cy="365760"/>
+            <a:ext cx="10058400" cy="365760"/>
           </a:xfrm>
           <a:prstGeom prst="rect">
             <a:avLst/>
@@ -5754,13 +5953,13 @@
           <a:lstStyle/>
           <a:p>
             <a:r>
-              <a:rPr sz="1200" b="1" i="0">
-                <a:solidFill>
-                  <a:srgbClr val="64748B"/>
-                </a:solidFill>
-                <a:latin typeface="Montserrat"/>
-              </a:rPr>
-              <a:t>APARTADO 3.3 · MÁS DE 70 KW</a:t>
+              <a:rPr sz="1300" b="1" i="0">
+                <a:solidFill>
+                  <a:srgbClr val="E8801A"/>
+                </a:solidFill>
+                <a:latin typeface="Montserrat"/>
+              </a:rPr>
+              <a:t>APARTADO 3.3 · POTENCIA COMÚN</a:t>
             </a:r>
           </a:p>
         </p:txBody>
@@ -5788,26 +5987,70 @@
           <a:lstStyle/>
           <a:p>
             <a:r>
-              <a:rPr sz="2700" b="1" i="0">
+              <a:rPr sz="2800" b="1" i="0">
                 <a:solidFill>
                   <a:srgbClr val="1E2761"/>
                 </a:solidFill>
                 <a:latin typeface="Montserrat"/>
               </a:rPr>
-              <a:t>Lo grande va aparte</a:t>
-            </a:r>
-          </a:p>
-        </p:txBody>
-      </p:sp>
-      <p:sp>
-        <p:nvSpPr>
-          <p:cNvPr id="7" name="TextBox 6"/>
+              <a:t>El edificio entero: la potencia Pc</a:t>
+            </a:r>
+          </a:p>
+        </p:txBody>
+      </p:sp>
+      <p:sp>
+        <p:nvSpPr>
+          <p:cNvPr id="7" name="Rounded Rectangle 6"/>
+          <p:cNvSpPr/>
+          <p:nvPr/>
+        </p:nvSpPr>
+        <p:spPr>
+          <a:xfrm>
+            <a:off x="868680" y="1627632"/>
+            <a:ext cx="2011680" cy="73152"/>
+          </a:xfrm>
+          <a:prstGeom prst="roundRect">
+            <a:avLst/>
+          </a:prstGeom>
+          <a:solidFill>
+            <a:srgbClr val="E8801A"/>
+          </a:solidFill>
+          <a:ln>
+            <a:noFill/>
+          </a:ln>
+          <a:effectLst/>
+        </p:spPr>
+        <p:style>
+          <a:lnRef idx="1">
+            <a:schemeClr val="accent1"/>
+          </a:lnRef>
+          <a:fillRef idx="3">
+            <a:schemeClr val="accent1"/>
+          </a:fillRef>
+          <a:effectRef idx="2">
+            <a:schemeClr val="accent1"/>
+          </a:effectRef>
+          <a:fontRef idx="minor">
+            <a:schemeClr val="lt1"/>
+          </a:fontRef>
+        </p:style>
+        <p:txBody>
+          <a:bodyPr rtlCol="0" anchor="ctr"/>
+          <a:lstStyle/>
+          <a:p>
+            <a:pPr algn="ctr"/>
+          </a:p>
+        </p:txBody>
+      </p:sp>
+      <p:sp>
+        <p:nvSpPr>
+          <p:cNvPr id="8" name="TextBox 7"/>
           <p:cNvSpPr txBox="1"/>
           <p:nvPr/>
         </p:nvSpPr>
         <p:spPr>
           <a:xfrm>
-            <a:off x="822960" y="1920240"/>
+            <a:off x="822960" y="1965960"/>
             <a:ext cx="4983480" cy="4206240"/>
           </a:xfrm>
           <a:prstGeom prst="rect">
@@ -5823,17 +6066,17 @@
           <a:p>
             <a:pPr>
               <a:spcAft>
-                <a:spcPts val="1000"/>
+                <a:spcPts val="1100"/>
               </a:spcAft>
             </a:pPr>
             <a:r>
               <a:rPr sz="1600" b="1" i="0">
                 <a:solidFill>
-                  <a:srgbClr val="2E3A80"/>
-                </a:solidFill>
-                <a:latin typeface="Montserrat"/>
-              </a:rPr>
-              <a:t>•  </a:t>
+                  <a:srgbClr val="E8801A"/>
+                </a:solidFill>
+                <a:latin typeface="Montserrat"/>
+              </a:rPr>
+              <a:t>▸  </a:t>
             </a:r>
             <a:r>
               <a:rPr sz="1600" b="0" i="0">
@@ -5842,23 +6085,23 @@
                 </a:solidFill>
                 <a:latin typeface="Montserrat"/>
               </a:rPr>
-              <a:t>Individualizar: conectar aguas arriba</a:t>
+              <a:t>Pc = Sn × ΣPiv + ΣPil</a:t>
             </a:r>
           </a:p>
           <a:p>
             <a:pPr>
               <a:spcAft>
-                <a:spcPts val="1000"/>
+                <a:spcPts val="1100"/>
               </a:spcAft>
             </a:pPr>
             <a:r>
               <a:rPr sz="1600" b="1" i="0">
                 <a:solidFill>
-                  <a:srgbClr val="2E3A80"/>
-                </a:solidFill>
-                <a:latin typeface="Montserrat"/>
-              </a:rPr>
-              <a:t>•  </a:t>
+                  <a:srgbClr val="E8801A"/>
+                </a:solidFill>
+                <a:latin typeface="Montserrat"/>
+              </a:rPr>
+              <a:t>▸  </a:t>
             </a:r>
             <a:r>
               <a:rPr sz="1600" b="0" i="0">
@@ -5867,23 +6110,23 @@
                 </a:solidFill>
                 <a:latin typeface="Montserrat"/>
               </a:rPr>
-              <a:t>Una llave a cada lado para aislar</a:t>
+              <a:t>Más viviendas, menos simultaneidad</a:t>
             </a:r>
           </a:p>
           <a:p>
             <a:pPr>
               <a:spcAft>
-                <a:spcPts val="1000"/>
+                <a:spcPts val="1100"/>
               </a:spcAft>
             </a:pPr>
             <a:r>
               <a:rPr sz="1600" b="1" i="0">
                 <a:solidFill>
-                  <a:srgbClr val="2E3A80"/>
-                </a:solidFill>
-                <a:latin typeface="Montserrat"/>
-              </a:rPr>
-              <a:t>•  </a:t>
+                  <a:srgbClr val="E8801A"/>
+                </a:solidFill>
+                <a:latin typeface="Montserrat"/>
+              </a:rPr>
+              <a:t>▸  </a:t>
             </a:r>
             <a:r>
               <a:rPr sz="1600" b="0" i="0">
@@ -5892,14 +6135,14 @@
                 </a:solidFill>
                 <a:latin typeface="Montserrat"/>
               </a:rPr>
-              <a:t>Restaurante, lavandería, caldera de bloque</a:t>
-            </a:r>
-          </a:p>
-        </p:txBody>
-      </p:sp>
-      <p:sp>
-        <p:nvSpPr>
-          <p:cNvPr id="8" name="imgph" descr="IMGQ:industrial gas shut off valve pipeline"/>
+              <a:t>Con calefacción, el factor sube</a:t>
+            </a:r>
+          </a:p>
+        </p:txBody>
+      </p:sp>
+      <p:sp>
+        <p:nvSpPr>
+          <p:cNvPr id="9" name="imgph" descr="IMGQ:apartment building gas riser pipes"/>
           <p:cNvSpPr/>
           <p:nvPr/>
         </p:nvSpPr>
@@ -5945,7 +6188,7 @@
       </p:sp>
       <p:sp>
         <p:nvSpPr>
-          <p:cNvPr id="9" name="TextBox 8"/>
+          <p:cNvPr id="10" name="TextBox 9"/>
           <p:cNvSpPr txBox="1"/>
           <p:nvPr/>
         </p:nvSpPr>
@@ -5985,7 +6228,7 @@
                 </a:solidFill>
                 <a:latin typeface="Montserrat"/>
               </a:rPr>
-              <a:t>industrial gas shut off valve pipeline</a:t>
+              <a:t>apartment building gas riser pipes</a:t>
             </a:r>
           </a:p>
         </p:txBody>
@@ -6082,7 +6325,7 @@
                 </a:solidFill>
                 <a:latin typeface="Montserrat"/>
               </a:rPr>
-              <a:t>013 / 016</a:t>
+              <a:t>013 / 017</a:t>
             </a:r>
           </a:p>
         </p:txBody>
@@ -6130,7 +6373,7 @@
         <p:spPr>
           <a:xfrm>
             <a:off x="822960" y="457200"/>
-            <a:ext cx="8229600" cy="365760"/>
+            <a:ext cx="10058400" cy="365760"/>
           </a:xfrm>
           <a:prstGeom prst="rect">
             <a:avLst/>
@@ -6144,13 +6387,13 @@
           <a:lstStyle/>
           <a:p>
             <a:r>
-              <a:rPr sz="1200" b="1" i="0">
-                <a:solidFill>
-                  <a:srgbClr val="64748B"/>
-                </a:solidFill>
-                <a:latin typeface="Montserrat"/>
-              </a:rPr>
-              <a:t>APARTADO 3.4 · CAUDALES DE DISEÑO</a:t>
+              <a:rPr sz="1300" b="1" i="0">
+                <a:solidFill>
+                  <a:srgbClr val="E8801A"/>
+                </a:solidFill>
+                <a:latin typeface="Montserrat"/>
+              </a:rPr>
+              <a:t>APARTADO 3.3 · MÁS DE 70 KW</a:t>
             </a:r>
           </a:p>
         </p:txBody>
@@ -6178,26 +6421,70 @@
           <a:lstStyle/>
           <a:p>
             <a:r>
-              <a:rPr sz="2700" b="1" i="0">
+              <a:rPr sz="2800" b="1" i="0">
                 <a:solidFill>
                   <a:srgbClr val="1E2761"/>
                 </a:solidFill>
                 <a:latin typeface="Montserrat"/>
               </a:rPr>
-              <a:t>Caudal = potencia entre Hs</a:t>
-            </a:r>
-          </a:p>
-        </p:txBody>
-      </p:sp>
-      <p:sp>
-        <p:nvSpPr>
-          <p:cNvPr id="7" name="TextBox 6"/>
+              <a:t>Lo grande va aparte</a:t>
+            </a:r>
+          </a:p>
+        </p:txBody>
+      </p:sp>
+      <p:sp>
+        <p:nvSpPr>
+          <p:cNvPr id="7" name="Rounded Rectangle 6"/>
+          <p:cNvSpPr/>
+          <p:nvPr/>
+        </p:nvSpPr>
+        <p:spPr>
+          <a:xfrm>
+            <a:off x="868680" y="1627632"/>
+            <a:ext cx="2011680" cy="73152"/>
+          </a:xfrm>
+          <a:prstGeom prst="roundRect">
+            <a:avLst/>
+          </a:prstGeom>
+          <a:solidFill>
+            <a:srgbClr val="E8801A"/>
+          </a:solidFill>
+          <a:ln>
+            <a:noFill/>
+          </a:ln>
+          <a:effectLst/>
+        </p:spPr>
+        <p:style>
+          <a:lnRef idx="1">
+            <a:schemeClr val="accent1"/>
+          </a:lnRef>
+          <a:fillRef idx="3">
+            <a:schemeClr val="accent1"/>
+          </a:fillRef>
+          <a:effectRef idx="2">
+            <a:schemeClr val="accent1"/>
+          </a:effectRef>
+          <a:fontRef idx="minor">
+            <a:schemeClr val="lt1"/>
+          </a:fontRef>
+        </p:style>
+        <p:txBody>
+          <a:bodyPr rtlCol="0" anchor="ctr"/>
+          <a:lstStyle/>
+          <a:p>
+            <a:pPr algn="ctr"/>
+          </a:p>
+        </p:txBody>
+      </p:sp>
+      <p:sp>
+        <p:nvSpPr>
+          <p:cNvPr id="8" name="TextBox 7"/>
           <p:cNvSpPr txBox="1"/>
           <p:nvPr/>
         </p:nvSpPr>
         <p:spPr>
           <a:xfrm>
-            <a:off x="822960" y="1920240"/>
+            <a:off x="822960" y="1965960"/>
             <a:ext cx="4983480" cy="4206240"/>
           </a:xfrm>
           <a:prstGeom prst="rect">
@@ -6213,17 +6500,17 @@
           <a:p>
             <a:pPr>
               <a:spcAft>
-                <a:spcPts val="1000"/>
+                <a:spcPts val="1100"/>
               </a:spcAft>
             </a:pPr>
             <a:r>
               <a:rPr sz="1600" b="1" i="0">
                 <a:solidFill>
-                  <a:srgbClr val="2E3A80"/>
-                </a:solidFill>
-                <a:latin typeface="Montserrat"/>
-              </a:rPr>
-              <a:t>•  </a:t>
+                  <a:srgbClr val="E8801A"/>
+                </a:solidFill>
+                <a:latin typeface="Montserrat"/>
+              </a:rPr>
+              <a:t>▸  </a:t>
             </a:r>
             <a:r>
               <a:rPr sz="1600" b="0" i="0">
@@ -6232,23 +6519,23 @@
                 </a:solidFill>
                 <a:latin typeface="Montserrat"/>
               </a:rPr>
-              <a:t>Individual: qsi = Pi / Hs</a:t>
+              <a:t>Individualizar: conectar aguas arriba</a:t>
             </a:r>
           </a:p>
           <a:p>
             <a:pPr>
               <a:spcAft>
-                <a:spcPts val="1000"/>
+                <a:spcPts val="1100"/>
               </a:spcAft>
             </a:pPr>
             <a:r>
               <a:rPr sz="1600" b="1" i="0">
                 <a:solidFill>
-                  <a:srgbClr val="2E3A80"/>
-                </a:solidFill>
-                <a:latin typeface="Montserrat"/>
-              </a:rPr>
-              <a:t>•  </a:t>
+                  <a:srgbClr val="E8801A"/>
+                </a:solidFill>
+                <a:latin typeface="Montserrat"/>
+              </a:rPr>
+              <a:t>▸  </a:t>
             </a:r>
             <a:r>
               <a:rPr sz="1600" b="0" i="0">
@@ -6257,23 +6544,23 @@
                 </a:solidFill>
                 <a:latin typeface="Montserrat"/>
               </a:rPr>
-              <a:t>Común: qsc = Pc / Hs</a:t>
+              <a:t>Una llave a cada lado para aislar</a:t>
             </a:r>
           </a:p>
           <a:p>
             <a:pPr>
               <a:spcAft>
-                <a:spcPts val="1000"/>
+                <a:spcPts val="1100"/>
               </a:spcAft>
             </a:pPr>
             <a:r>
               <a:rPr sz="1600" b="1" i="0">
                 <a:solidFill>
-                  <a:srgbClr val="2E3A80"/>
-                </a:solidFill>
-                <a:latin typeface="Montserrat"/>
-              </a:rPr>
-              <a:t>•  </a:t>
+                  <a:srgbClr val="E8801A"/>
+                </a:solidFill>
+                <a:latin typeface="Montserrat"/>
+              </a:rPr>
+              <a:t>▸  </a:t>
             </a:r>
             <a:r>
               <a:rPr sz="1600" b="0" i="0">
@@ -6282,14 +6569,14 @@
                 </a:solidFill>
                 <a:latin typeface="Montserrat"/>
               </a:rPr>
-              <a:t>Si el gas va por masa, en kg/h</a:t>
-            </a:r>
-          </a:p>
-        </p:txBody>
-      </p:sp>
-      <p:sp>
-        <p:nvSpPr>
-          <p:cNvPr id="8" name="imgph" descr="IMGQ:gas flow meter dial gauge"/>
+              <a:t>Restaurante, lavandería, caldera de bloque</a:t>
+            </a:r>
+          </a:p>
+        </p:txBody>
+      </p:sp>
+      <p:sp>
+        <p:nvSpPr>
+          <p:cNvPr id="9" name="imgph" descr="IMGQ:industrial gas shut off valve pipeline"/>
           <p:cNvSpPr/>
           <p:nvPr/>
         </p:nvSpPr>
@@ -6335,7 +6622,7 @@
       </p:sp>
       <p:sp>
         <p:nvSpPr>
-          <p:cNvPr id="9" name="TextBox 8"/>
+          <p:cNvPr id="10" name="TextBox 9"/>
           <p:cNvSpPr txBox="1"/>
           <p:nvPr/>
         </p:nvSpPr>
@@ -6375,7 +6662,7 @@
                 </a:solidFill>
                 <a:latin typeface="Montserrat"/>
               </a:rPr>
-              <a:t>gas flow meter dial gauge</a:t>
+              <a:t>industrial gas shut off valve pipeline</a:t>
             </a:r>
           </a:p>
         </p:txBody>
@@ -6472,7 +6759,7 @@
                 </a:solidFill>
                 <a:latin typeface="Montserrat"/>
               </a:rPr>
-              <a:t>014 / 016</a:t>
+              <a:t>014 / 017</a:t>
             </a:r>
           </a:p>
         </p:txBody>
@@ -6520,7 +6807,7 @@
         <p:spPr>
           <a:xfrm>
             <a:off x="822960" y="457200"/>
-            <a:ext cx="8229600" cy="365760"/>
+            <a:ext cx="10058400" cy="365760"/>
           </a:xfrm>
           <a:prstGeom prst="rect">
             <a:avLst/>
@@ -6534,13 +6821,13 @@
           <a:lstStyle/>
           <a:p>
             <a:r>
-              <a:rPr sz="1200" b="1" i="0">
-                <a:solidFill>
-                  <a:srgbClr val="64748B"/>
-                </a:solidFill>
-                <a:latin typeface="Montserrat"/>
-              </a:rPr>
-              <a:t>APARTADO 3.5 · CRITERIOS DE CÁLCULO</a:t>
+              <a:rPr sz="1300" b="1" i="0">
+                <a:solidFill>
+                  <a:srgbClr val="E8801A"/>
+                </a:solidFill>
+                <a:latin typeface="Montserrat"/>
+              </a:rPr>
+              <a:t>APARTADO 3.4 · CAUDALES DE DISEÑO</a:t>
             </a:r>
           </a:p>
         </p:txBody>
@@ -6568,26 +6855,70 @@
           <a:lstStyle/>
           <a:p>
             <a:r>
-              <a:rPr sz="2700" b="1" i="0">
+              <a:rPr sz="2800" b="1" i="0">
                 <a:solidFill>
                   <a:srgbClr val="1E2761"/>
                 </a:solidFill>
                 <a:latin typeface="Montserrat"/>
               </a:rPr>
-              <a:t>Dos topes que caen fijo</a:t>
-            </a:r>
-          </a:p>
-        </p:txBody>
-      </p:sp>
-      <p:sp>
-        <p:nvSpPr>
-          <p:cNvPr id="7" name="TextBox 6"/>
+              <a:t>Caudal = potencia entre Hs</a:t>
+            </a:r>
+          </a:p>
+        </p:txBody>
+      </p:sp>
+      <p:sp>
+        <p:nvSpPr>
+          <p:cNvPr id="7" name="Rounded Rectangle 6"/>
+          <p:cNvSpPr/>
+          <p:nvPr/>
+        </p:nvSpPr>
+        <p:spPr>
+          <a:xfrm>
+            <a:off x="868680" y="1627632"/>
+            <a:ext cx="2011680" cy="73152"/>
+          </a:xfrm>
+          <a:prstGeom prst="roundRect">
+            <a:avLst/>
+          </a:prstGeom>
+          <a:solidFill>
+            <a:srgbClr val="E8801A"/>
+          </a:solidFill>
+          <a:ln>
+            <a:noFill/>
+          </a:ln>
+          <a:effectLst/>
+        </p:spPr>
+        <p:style>
+          <a:lnRef idx="1">
+            <a:schemeClr val="accent1"/>
+          </a:lnRef>
+          <a:fillRef idx="3">
+            <a:schemeClr val="accent1"/>
+          </a:fillRef>
+          <a:effectRef idx="2">
+            <a:schemeClr val="accent1"/>
+          </a:effectRef>
+          <a:fontRef idx="minor">
+            <a:schemeClr val="lt1"/>
+          </a:fontRef>
+        </p:style>
+        <p:txBody>
+          <a:bodyPr rtlCol="0" anchor="ctr"/>
+          <a:lstStyle/>
+          <a:p>
+            <a:pPr algn="ctr"/>
+          </a:p>
+        </p:txBody>
+      </p:sp>
+      <p:sp>
+        <p:nvSpPr>
+          <p:cNvPr id="8" name="TextBox 7"/>
           <p:cNvSpPr txBox="1"/>
           <p:nvPr/>
         </p:nvSpPr>
         <p:spPr>
           <a:xfrm>
-            <a:off x="822960" y="1920240"/>
+            <a:off x="822960" y="1965960"/>
             <a:ext cx="4983480" cy="4206240"/>
           </a:xfrm>
           <a:prstGeom prst="rect">
@@ -6603,17 +6934,17 @@
           <a:p>
             <a:pPr>
               <a:spcAft>
-                <a:spcPts val="1000"/>
+                <a:spcPts val="1100"/>
               </a:spcAft>
             </a:pPr>
             <a:r>
               <a:rPr sz="1600" b="1" i="0">
                 <a:solidFill>
-                  <a:srgbClr val="2E3A80"/>
-                </a:solidFill>
-                <a:latin typeface="Montserrat"/>
-              </a:rPr>
-              <a:t>•  </a:t>
+                  <a:srgbClr val="E8801A"/>
+                </a:solidFill>
+                <a:latin typeface="Montserrat"/>
+              </a:rPr>
+              <a:t>▸  </a:t>
             </a:r>
             <a:r>
               <a:rPr sz="1600" b="0" i="0">
@@ -6622,23 +6953,23 @@
                 </a:solidFill>
                 <a:latin typeface="Montserrat"/>
               </a:rPr>
-              <a:t>Velocidad máxima: 20 m/s</a:t>
+              <a:t>Individual: qsi = Pi / Hs</a:t>
             </a:r>
           </a:p>
           <a:p>
             <a:pPr>
               <a:spcAft>
-                <a:spcPts val="1000"/>
+                <a:spcPts val="1100"/>
               </a:spcAft>
             </a:pPr>
             <a:r>
               <a:rPr sz="1600" b="1" i="0">
                 <a:solidFill>
-                  <a:srgbClr val="2E3A80"/>
-                </a:solidFill>
-                <a:latin typeface="Montserrat"/>
-              </a:rPr>
-              <a:t>•  </a:t>
+                  <a:srgbClr val="E8801A"/>
+                </a:solidFill>
+                <a:latin typeface="Montserrat"/>
+              </a:rPr>
+              <a:t>▸  </a:t>
             </a:r>
             <a:r>
               <a:rPr sz="1600" b="0" i="0">
@@ -6647,23 +6978,23 @@
                 </a:solidFill>
                 <a:latin typeface="Montserrat"/>
               </a:rPr>
-              <a:t>Presión mínima gas natural: 17 mbar</a:t>
+              <a:t>Común: qsc = Pc / Hs</a:t>
             </a:r>
           </a:p>
           <a:p>
             <a:pPr>
               <a:spcAft>
-                <a:spcPts val="1000"/>
+                <a:spcPts val="1100"/>
               </a:spcAft>
             </a:pPr>
             <a:r>
               <a:rPr sz="1600" b="1" i="0">
                 <a:solidFill>
-                  <a:srgbClr val="2E3A80"/>
-                </a:solidFill>
-                <a:latin typeface="Montserrat"/>
-              </a:rPr>
-              <a:t>•  </a:t>
+                  <a:srgbClr val="E8801A"/>
+                </a:solidFill>
+                <a:latin typeface="Montserrat"/>
+              </a:rPr>
+              <a:t>▸  </a:t>
             </a:r>
             <a:r>
               <a:rPr sz="1600" b="0" i="0">
@@ -6672,14 +7003,14 @@
                 </a:solidFill>
                 <a:latin typeface="Montserrat"/>
               </a:rPr>
-              <a:t>Butano 20; propano 42,5 o 25 mbar</a:t>
-            </a:r>
-          </a:p>
-        </p:txBody>
-      </p:sp>
-      <p:sp>
-        <p:nvSpPr>
-          <p:cNvPr id="8" name="imgph" descr="IMGQ:blue gas flame burner close up"/>
+              <a:t>Si el gas va por masa, en kg/h</a:t>
+            </a:r>
+          </a:p>
+        </p:txBody>
+      </p:sp>
+      <p:sp>
+        <p:nvSpPr>
+          <p:cNvPr id="9" name="imgph" descr="IMGQ:gas flow meter dial gauge"/>
           <p:cNvSpPr/>
           <p:nvPr/>
         </p:nvSpPr>
@@ -6725,7 +7056,7 @@
       </p:sp>
       <p:sp>
         <p:nvSpPr>
-          <p:cNvPr id="9" name="TextBox 8"/>
+          <p:cNvPr id="10" name="TextBox 9"/>
           <p:cNvSpPr txBox="1"/>
           <p:nvPr/>
         </p:nvSpPr>
@@ -6765,7 +7096,7 @@
                 </a:solidFill>
                 <a:latin typeface="Montserrat"/>
               </a:rPr>
-              <a:t>blue gas flame burner close up</a:t>
+              <a:t>gas flow meter dial gauge</a:t>
             </a:r>
           </a:p>
         </p:txBody>
@@ -6862,7 +7193,7 @@
                 </a:solidFill>
                 <a:latin typeface="Montserrat"/>
               </a:rPr>
-              <a:t>015 / 016</a:t>
+              <a:t>015 / 017</a:t>
             </a:r>
           </a:p>
         </p:txBody>
@@ -6910,7 +7241,7 @@
         <p:spPr>
           <a:xfrm>
             <a:off x="822960" y="457200"/>
-            <a:ext cx="8229600" cy="365760"/>
+            <a:ext cx="10058400" cy="365760"/>
           </a:xfrm>
           <a:prstGeom prst="rect">
             <a:avLst/>
@@ -6924,13 +7255,13 @@
           <a:lstStyle/>
           <a:p>
             <a:r>
-              <a:rPr sz="1200" b="1" i="0">
-                <a:solidFill>
-                  <a:srgbClr val="64748B"/>
-                </a:solidFill>
-                <a:latin typeface="Montserrat"/>
-              </a:rPr>
-              <a:t>DOCUMENTACIÓN</a:t>
+              <a:rPr sz="1300" b="1" i="0">
+                <a:solidFill>
+                  <a:srgbClr val="E8801A"/>
+                </a:solidFill>
+                <a:latin typeface="Montserrat"/>
+              </a:rPr>
+              <a:t>APARTADO 3.5 · CRITERIOS DE CÁLCULO</a:t>
             </a:r>
           </a:p>
         </p:txBody>
@@ -6958,26 +7289,70 @@
           <a:lstStyle/>
           <a:p>
             <a:r>
-              <a:rPr sz="2700" b="1" i="0">
+              <a:rPr sz="2800" b="1" i="0">
                 <a:solidFill>
                   <a:srgbClr val="1E2761"/>
                 </a:solidFill>
                 <a:latin typeface="Montserrat"/>
               </a:rPr>
-              <a:t>Del cálculo al certificado</a:t>
-            </a:r>
-          </a:p>
-        </p:txBody>
-      </p:sp>
-      <p:sp>
-        <p:nvSpPr>
-          <p:cNvPr id="7" name="TextBox 6"/>
+              <a:t>Dos topes que caen fijo</a:t>
+            </a:r>
+          </a:p>
+        </p:txBody>
+      </p:sp>
+      <p:sp>
+        <p:nvSpPr>
+          <p:cNvPr id="7" name="Rounded Rectangle 6"/>
+          <p:cNvSpPr/>
+          <p:nvPr/>
+        </p:nvSpPr>
+        <p:spPr>
+          <a:xfrm>
+            <a:off x="868680" y="1627632"/>
+            <a:ext cx="2011680" cy="73152"/>
+          </a:xfrm>
+          <a:prstGeom prst="roundRect">
+            <a:avLst/>
+          </a:prstGeom>
+          <a:solidFill>
+            <a:srgbClr val="E8801A"/>
+          </a:solidFill>
+          <a:ln>
+            <a:noFill/>
+          </a:ln>
+          <a:effectLst/>
+        </p:spPr>
+        <p:style>
+          <a:lnRef idx="1">
+            <a:schemeClr val="accent1"/>
+          </a:lnRef>
+          <a:fillRef idx="3">
+            <a:schemeClr val="accent1"/>
+          </a:fillRef>
+          <a:effectRef idx="2">
+            <a:schemeClr val="accent1"/>
+          </a:effectRef>
+          <a:fontRef idx="minor">
+            <a:schemeClr val="lt1"/>
+          </a:fontRef>
+        </p:style>
+        <p:txBody>
+          <a:bodyPr rtlCol="0" anchor="ctr"/>
+          <a:lstStyle/>
+          <a:p>
+            <a:pPr algn="ctr"/>
+          </a:p>
+        </p:txBody>
+      </p:sp>
+      <p:sp>
+        <p:nvSpPr>
+          <p:cNvPr id="8" name="TextBox 7"/>
           <p:cNvSpPr txBox="1"/>
           <p:nvPr/>
         </p:nvSpPr>
         <p:spPr>
           <a:xfrm>
-            <a:off x="822960" y="1920240"/>
+            <a:off x="822960" y="1965960"/>
             <a:ext cx="4983480" cy="4206240"/>
           </a:xfrm>
           <a:prstGeom prst="rect">
@@ -6993,17 +7368,17 @@
           <a:p>
             <a:pPr>
               <a:spcAft>
-                <a:spcPts val="1000"/>
+                <a:spcPts val="1100"/>
               </a:spcAft>
             </a:pPr>
             <a:r>
               <a:rPr sz="1600" b="1" i="0">
                 <a:solidFill>
-                  <a:srgbClr val="2E3A80"/>
-                </a:solidFill>
-                <a:latin typeface="Montserrat"/>
-              </a:rPr>
-              <a:t>•  </a:t>
+                  <a:srgbClr val="E8801A"/>
+                </a:solidFill>
+                <a:latin typeface="Montserrat"/>
+              </a:rPr>
+              <a:t>▸  </a:t>
             </a:r>
             <a:r>
               <a:rPr sz="1600" b="0" i="0">
@@ -7012,23 +7387,23 @@
                 </a:solidFill>
                 <a:latin typeface="Montserrat"/>
               </a:rPr>
-              <a:t>Cálculos en memoria o proyecto</a:t>
+              <a:t>Velocidad máxima: 20 m/s</a:t>
             </a:r>
           </a:p>
           <a:p>
             <a:pPr>
               <a:spcAft>
-                <a:spcPts val="1000"/>
+                <a:spcPts val="1100"/>
               </a:spcAft>
             </a:pPr>
             <a:r>
               <a:rPr sz="1600" b="1" i="0">
                 <a:solidFill>
-                  <a:srgbClr val="2E3A80"/>
-                </a:solidFill>
-                <a:latin typeface="Montserrat"/>
-              </a:rPr>
-              <a:t>•  </a:t>
+                  <a:srgbClr val="E8801A"/>
+                </a:solidFill>
+                <a:latin typeface="Montserrat"/>
+              </a:rPr>
+              <a:t>▸  </a:t>
             </a:r>
             <a:r>
               <a:rPr sz="1600" b="0" i="0">
@@ -7037,23 +7412,23 @@
                 </a:solidFill>
                 <a:latin typeface="Montserrat"/>
               </a:rPr>
-              <a:t>Certificado de instalación (modelo IRG)</a:t>
+              <a:t>Presión mínima gas natural: 17 mbar</a:t>
             </a:r>
           </a:p>
           <a:p>
             <a:pPr>
               <a:spcAft>
-                <a:spcPts val="1000"/>
+                <a:spcPts val="1100"/>
               </a:spcAft>
             </a:pPr>
             <a:r>
               <a:rPr sz="1600" b="1" i="0">
                 <a:solidFill>
-                  <a:srgbClr val="2E3A80"/>
-                </a:solidFill>
-                <a:latin typeface="Montserrat"/>
-              </a:rPr>
-              <a:t>•  </a:t>
+                  <a:srgbClr val="E8801A"/>
+                </a:solidFill>
+                <a:latin typeface="Montserrat"/>
+              </a:rPr>
+              <a:t>▸  </a:t>
             </a:r>
             <a:r>
               <a:rPr sz="1600" b="0" i="0">
@@ -7062,14 +7437,14 @@
                 </a:solidFill>
                 <a:latin typeface="Montserrat"/>
               </a:rPr>
-              <a:t>Firma la empresa instaladora habilitada</a:t>
-            </a:r>
-          </a:p>
-        </p:txBody>
-      </p:sp>
-      <p:sp>
-        <p:nvSpPr>
-          <p:cNvPr id="8" name="imgph" descr="IMGQ:installer signing installation certificate document"/>
+              <a:t>Butano 20; propano 42,5 o 25 mbar</a:t>
+            </a:r>
+          </a:p>
+        </p:txBody>
+      </p:sp>
+      <p:sp>
+        <p:nvSpPr>
+          <p:cNvPr id="9" name="imgph" descr="IMGQ:blue gas flame burner close up"/>
           <p:cNvSpPr/>
           <p:nvPr/>
         </p:nvSpPr>
@@ -7115,7 +7490,7 @@
       </p:sp>
       <p:sp>
         <p:nvSpPr>
-          <p:cNvPr id="9" name="TextBox 8"/>
+          <p:cNvPr id="10" name="TextBox 9"/>
           <p:cNvSpPr txBox="1"/>
           <p:nvPr/>
         </p:nvSpPr>
@@ -7155,7 +7530,7 @@
                 </a:solidFill>
                 <a:latin typeface="Montserrat"/>
               </a:rPr>
-              <a:t>installer signing installation certificate document</a:t>
+              <a:t>blue gas flame burner close up</a:t>
             </a:r>
           </a:p>
         </p:txBody>
@@ -7193,6 +7568,440 @@
             <a:avLst/>
           </a:prstGeom>
           <a:solidFill>
+            <a:srgbClr val="FFFFFF"/>
+          </a:solidFill>
+          <a:ln>
+            <a:noFill/>
+          </a:ln>
+          <a:effectLst/>
+        </p:spPr>
+        <p:style>
+          <a:lnRef idx="1">
+            <a:schemeClr val="accent1"/>
+          </a:lnRef>
+          <a:fillRef idx="3">
+            <a:schemeClr val="accent1"/>
+          </a:fillRef>
+          <a:effectRef idx="2">
+            <a:schemeClr val="accent1"/>
+          </a:effectRef>
+          <a:fontRef idx="minor">
+            <a:schemeClr val="lt1"/>
+          </a:fontRef>
+        </p:style>
+        <p:txBody>
+          <a:bodyPr rtlCol="0" anchor="ctr"/>
+          <a:lstStyle/>
+          <a:p>
+            <a:pPr algn="ctr"/>
+          </a:p>
+        </p:txBody>
+      </p:sp>
+      <p:sp>
+        <p:nvSpPr>
+          <p:cNvPr id="3" name="TextBox 2"/>
+          <p:cNvSpPr txBox="1"/>
+          <p:nvPr/>
+        </p:nvSpPr>
+        <p:spPr>
+          <a:xfrm>
+            <a:off x="10607040" y="320040"/>
+            <a:ext cx="1371600" cy="365760"/>
+          </a:xfrm>
+          <a:prstGeom prst="rect">
+            <a:avLst/>
+          </a:prstGeom>
+          <a:noFill/>
+        </p:spPr>
+        <p:txBody>
+          <a:bodyPr wrap="square">
+            <a:spAutoFit/>
+          </a:bodyPr>
+          <a:lstStyle/>
+          <a:p>
+            <a:pPr algn="r"/>
+            <a:r>
+              <a:rPr sz="1000" b="1" i="0">
+                <a:solidFill>
+                  <a:srgbClr val="64748B"/>
+                </a:solidFill>
+                <a:latin typeface="Montserrat"/>
+              </a:rPr>
+              <a:t>016 / 017</a:t>
+            </a:r>
+          </a:p>
+        </p:txBody>
+      </p:sp>
+      <p:sp>
+        <p:nvSpPr>
+          <p:cNvPr id="4" name="TextBox 3"/>
+          <p:cNvSpPr txBox="1"/>
+          <p:nvPr/>
+        </p:nvSpPr>
+        <p:spPr>
+          <a:xfrm>
+            <a:off x="457200" y="6419088"/>
+            <a:ext cx="8229600" cy="365760"/>
+          </a:xfrm>
+          <a:prstGeom prst="rect">
+            <a:avLst/>
+          </a:prstGeom>
+          <a:noFill/>
+        </p:spPr>
+        <p:txBody>
+          <a:bodyPr wrap="square">
+            <a:spAutoFit/>
+          </a:bodyPr>
+          <a:lstStyle/>
+          <a:p>
+            <a:r>
+              <a:rPr sz="900" b="0" i="0">
+                <a:solidFill>
+                  <a:srgbClr val="64748B"/>
+                </a:solidFill>
+                <a:latin typeface="Montserrat"/>
+              </a:rPr>
+              <a:t>Curso Gas B · Tema 11 · UNE 60670-4 · Diseño y construcción</a:t>
+            </a:r>
+          </a:p>
+        </p:txBody>
+      </p:sp>
+      <p:sp>
+        <p:nvSpPr>
+          <p:cNvPr id="5" name="TextBox 4"/>
+          <p:cNvSpPr txBox="1"/>
+          <p:nvPr/>
+        </p:nvSpPr>
+        <p:spPr>
+          <a:xfrm>
+            <a:off x="822960" y="457200"/>
+            <a:ext cx="10058400" cy="365760"/>
+          </a:xfrm>
+          <a:prstGeom prst="rect">
+            <a:avLst/>
+          </a:prstGeom>
+          <a:noFill/>
+        </p:spPr>
+        <p:txBody>
+          <a:bodyPr wrap="square">
+            <a:spAutoFit/>
+          </a:bodyPr>
+          <a:lstStyle/>
+          <a:p>
+            <a:r>
+              <a:rPr sz="1300" b="1" i="0">
+                <a:solidFill>
+                  <a:srgbClr val="E8801A"/>
+                </a:solidFill>
+                <a:latin typeface="Montserrat"/>
+              </a:rPr>
+              <a:t>DOCUMENTACIÓN</a:t>
+            </a:r>
+          </a:p>
+        </p:txBody>
+      </p:sp>
+      <p:sp>
+        <p:nvSpPr>
+          <p:cNvPr id="6" name="TextBox 5"/>
+          <p:cNvSpPr txBox="1"/>
+          <p:nvPr/>
+        </p:nvSpPr>
+        <p:spPr>
+          <a:xfrm>
+            <a:off x="822960" y="868680"/>
+            <a:ext cx="10515600" cy="914400"/>
+          </a:xfrm>
+          <a:prstGeom prst="rect">
+            <a:avLst/>
+          </a:prstGeom>
+          <a:noFill/>
+        </p:spPr>
+        <p:txBody>
+          <a:bodyPr wrap="square">
+            <a:spAutoFit/>
+          </a:bodyPr>
+          <a:lstStyle/>
+          <a:p>
+            <a:r>
+              <a:rPr sz="2800" b="1" i="0">
+                <a:solidFill>
+                  <a:srgbClr val="1E2761"/>
+                </a:solidFill>
+                <a:latin typeface="Montserrat"/>
+              </a:rPr>
+              <a:t>Del cálculo al certificado</a:t>
+            </a:r>
+          </a:p>
+        </p:txBody>
+      </p:sp>
+      <p:sp>
+        <p:nvSpPr>
+          <p:cNvPr id="7" name="Rounded Rectangle 6"/>
+          <p:cNvSpPr/>
+          <p:nvPr/>
+        </p:nvSpPr>
+        <p:spPr>
+          <a:xfrm>
+            <a:off x="868680" y="1627632"/>
+            <a:ext cx="2011680" cy="73152"/>
+          </a:xfrm>
+          <a:prstGeom prst="roundRect">
+            <a:avLst/>
+          </a:prstGeom>
+          <a:solidFill>
+            <a:srgbClr val="E8801A"/>
+          </a:solidFill>
+          <a:ln>
+            <a:noFill/>
+          </a:ln>
+          <a:effectLst/>
+        </p:spPr>
+        <p:style>
+          <a:lnRef idx="1">
+            <a:schemeClr val="accent1"/>
+          </a:lnRef>
+          <a:fillRef idx="3">
+            <a:schemeClr val="accent1"/>
+          </a:fillRef>
+          <a:effectRef idx="2">
+            <a:schemeClr val="accent1"/>
+          </a:effectRef>
+          <a:fontRef idx="minor">
+            <a:schemeClr val="lt1"/>
+          </a:fontRef>
+        </p:style>
+        <p:txBody>
+          <a:bodyPr rtlCol="0" anchor="ctr"/>
+          <a:lstStyle/>
+          <a:p>
+            <a:pPr algn="ctr"/>
+          </a:p>
+        </p:txBody>
+      </p:sp>
+      <p:sp>
+        <p:nvSpPr>
+          <p:cNvPr id="8" name="TextBox 7"/>
+          <p:cNvSpPr txBox="1"/>
+          <p:nvPr/>
+        </p:nvSpPr>
+        <p:spPr>
+          <a:xfrm>
+            <a:off x="822960" y="1965960"/>
+            <a:ext cx="4983480" cy="4206240"/>
+          </a:xfrm>
+          <a:prstGeom prst="rect">
+            <a:avLst/>
+          </a:prstGeom>
+          <a:noFill/>
+        </p:spPr>
+        <p:txBody>
+          <a:bodyPr wrap="square">
+            <a:spAutoFit/>
+          </a:bodyPr>
+          <a:lstStyle/>
+          <a:p>
+            <a:pPr>
+              <a:spcAft>
+                <a:spcPts val="1100"/>
+              </a:spcAft>
+            </a:pPr>
+            <a:r>
+              <a:rPr sz="1600" b="1" i="0">
+                <a:solidFill>
+                  <a:srgbClr val="E8801A"/>
+                </a:solidFill>
+                <a:latin typeface="Montserrat"/>
+              </a:rPr>
+              <a:t>▸  </a:t>
+            </a:r>
+            <a:r>
+              <a:rPr sz="1600" b="0" i="0">
+                <a:solidFill>
+                  <a:srgbClr val="1B2330"/>
+                </a:solidFill>
+                <a:latin typeface="Montserrat"/>
+              </a:rPr>
+              <a:t>Cálculos en memoria o proyecto</a:t>
+            </a:r>
+          </a:p>
+          <a:p>
+            <a:pPr>
+              <a:spcAft>
+                <a:spcPts val="1100"/>
+              </a:spcAft>
+            </a:pPr>
+            <a:r>
+              <a:rPr sz="1600" b="1" i="0">
+                <a:solidFill>
+                  <a:srgbClr val="E8801A"/>
+                </a:solidFill>
+                <a:latin typeface="Montserrat"/>
+              </a:rPr>
+              <a:t>▸  </a:t>
+            </a:r>
+            <a:r>
+              <a:rPr sz="1600" b="0" i="0">
+                <a:solidFill>
+                  <a:srgbClr val="1B2330"/>
+                </a:solidFill>
+                <a:latin typeface="Montserrat"/>
+              </a:rPr>
+              <a:t>Certificado de instalación (modelo IRG)</a:t>
+            </a:r>
+          </a:p>
+          <a:p>
+            <a:pPr>
+              <a:spcAft>
+                <a:spcPts val="1100"/>
+              </a:spcAft>
+            </a:pPr>
+            <a:r>
+              <a:rPr sz="1600" b="1" i="0">
+                <a:solidFill>
+                  <a:srgbClr val="E8801A"/>
+                </a:solidFill>
+                <a:latin typeface="Montserrat"/>
+              </a:rPr>
+              <a:t>▸  </a:t>
+            </a:r>
+            <a:r>
+              <a:rPr sz="1600" b="0" i="0">
+                <a:solidFill>
+                  <a:srgbClr val="1B2330"/>
+                </a:solidFill>
+                <a:latin typeface="Montserrat"/>
+              </a:rPr>
+              <a:t>Firma la empresa instaladora habilitada</a:t>
+            </a:r>
+          </a:p>
+        </p:txBody>
+      </p:sp>
+      <p:sp>
+        <p:nvSpPr>
+          <p:cNvPr id="9" name="imgph" descr="IMGQ:installer signing installation certificate document"/>
+          <p:cNvSpPr/>
+          <p:nvPr/>
+        </p:nvSpPr>
+        <p:spPr>
+          <a:xfrm>
+            <a:off x="5806440" y="1051560"/>
+            <a:ext cx="5298947" cy="4629150"/>
+          </a:xfrm>
+          <a:prstGeom prst="roundRect">
+            <a:avLst/>
+          </a:prstGeom>
+          <a:solidFill>
+            <a:srgbClr val="F3F6FB"/>
+          </a:solidFill>
+          <a:ln w="12700">
+            <a:solidFill>
+              <a:srgbClr val="C7D2E6"/>
+            </a:solidFill>
+          </a:ln>
+          <a:effectLst/>
+        </p:spPr>
+        <p:style>
+          <a:lnRef idx="1">
+            <a:schemeClr val="accent1"/>
+          </a:lnRef>
+          <a:fillRef idx="3">
+            <a:schemeClr val="accent1"/>
+          </a:fillRef>
+          <a:effectRef idx="2">
+            <a:schemeClr val="accent1"/>
+          </a:effectRef>
+          <a:fontRef idx="minor">
+            <a:schemeClr val="lt1"/>
+          </a:fontRef>
+        </p:style>
+        <p:txBody>
+          <a:bodyPr rtlCol="0" anchor="ctr"/>
+          <a:lstStyle/>
+          <a:p>
+            <a:pPr algn="ctr"/>
+          </a:p>
+        </p:txBody>
+      </p:sp>
+      <p:sp>
+        <p:nvSpPr>
+          <p:cNvPr id="10" name="TextBox 9"/>
+          <p:cNvSpPr txBox="1"/>
+          <p:nvPr/>
+        </p:nvSpPr>
+        <p:spPr>
+          <a:xfrm>
+            <a:off x="6080760" y="2726055"/>
+            <a:ext cx="4750307" cy="1280160"/>
+          </a:xfrm>
+          <a:prstGeom prst="rect">
+            <a:avLst/>
+          </a:prstGeom>
+          <a:noFill/>
+        </p:spPr>
+        <p:txBody>
+          <a:bodyPr wrap="square">
+            <a:spAutoFit/>
+          </a:bodyPr>
+          <a:lstStyle/>
+          <a:p>
+            <a:pPr algn="ctr"/>
+            <a:r>
+              <a:rPr sz="1400" b="1" i="0">
+                <a:solidFill>
+                  <a:srgbClr val="64748B"/>
+                </a:solidFill>
+                <a:latin typeface="Montserrat"/>
+              </a:rPr>
+              <a:t>IMAGEN REALISTA</a:t>
+            </a:r>
+          </a:p>
+          <a:p>
+            <a:pPr algn="ctr"/>
+            <a:r>
+              <a:rPr sz="1100" b="0" i="1">
+                <a:solidFill>
+                  <a:srgbClr val="64748B"/>
+                </a:solidFill>
+                <a:latin typeface="Montserrat"/>
+              </a:rPr>
+              <a:t>installer signing installation certificate document</a:t>
+            </a:r>
+          </a:p>
+        </p:txBody>
+      </p:sp>
+    </p:spTree>
+  </p:cSld>
+  <p:clrMapOvr>
+    <a:masterClrMapping/>
+  </p:clrMapOvr>
+</p:sld>
+</file>
+
+<file path=ppt/slides/slide17.xml><?xml version="1.0" encoding="utf-8"?>
+<p:sld xmlns:a="http://schemas.openxmlformats.org/drawingml/2006/main" xmlns:p="http://schemas.openxmlformats.org/presentationml/2006/main" xmlns:r="http://schemas.openxmlformats.org/officeDocument/2006/relationships">
+  <p:cSld>
+    <p:spTree>
+      <p:nvGrpSpPr>
+        <p:cNvPr id="1" name=""/>
+        <p:cNvGrpSpPr/>
+        <p:nvPr/>
+      </p:nvGrpSpPr>
+      <p:grpSpPr/>
+      <p:sp>
+        <p:nvSpPr>
+          <p:cNvPr id="2" name="Rectangle 1"/>
+          <p:cNvSpPr/>
+          <p:nvPr/>
+        </p:nvSpPr>
+        <p:spPr>
+          <a:xfrm>
+            <a:off x="0" y="0"/>
+            <a:ext cx="12191695" cy="6858000"/>
+          </a:xfrm>
+          <a:prstGeom prst="rect">
+            <a:avLst/>
+          </a:prstGeom>
+          <a:solidFill>
             <a:srgbClr val="1E2761"/>
           </a:solidFill>
           <a:ln>
@@ -7247,7 +8056,7 @@
             <a:r>
               <a:rPr sz="1400" b="1" i="0">
                 <a:solidFill>
-                  <a:srgbClr val="CADCFC"/>
+                  <a:srgbClr val="F4A24C"/>
                 </a:solidFill>
                 <a:latin typeface="Montserrat"/>
               </a:rPr>
@@ -7258,13 +8067,57 @@
       </p:sp>
       <p:sp>
         <p:nvSpPr>
-          <p:cNvPr id="4" name="TextBox 3"/>
+          <p:cNvPr id="4" name="Rounded Rectangle 3"/>
+          <p:cNvSpPr/>
+          <p:nvPr/>
+        </p:nvSpPr>
+        <p:spPr>
+          <a:xfrm>
+            <a:off x="868680" y="1051560"/>
+            <a:ext cx="1463040" cy="82296"/>
+          </a:xfrm>
+          <a:prstGeom prst="roundRect">
+            <a:avLst/>
+          </a:prstGeom>
+          <a:solidFill>
+            <a:srgbClr val="E8801A"/>
+          </a:solidFill>
+          <a:ln>
+            <a:noFill/>
+          </a:ln>
+          <a:effectLst/>
+        </p:spPr>
+        <p:style>
+          <a:lnRef idx="1">
+            <a:schemeClr val="accent1"/>
+          </a:lnRef>
+          <a:fillRef idx="3">
+            <a:schemeClr val="accent1"/>
+          </a:fillRef>
+          <a:effectRef idx="2">
+            <a:schemeClr val="accent1"/>
+          </a:effectRef>
+          <a:fontRef idx="minor">
+            <a:schemeClr val="lt1"/>
+          </a:fontRef>
+        </p:style>
+        <p:txBody>
+          <a:bodyPr rtlCol="0" anchor="ctr"/>
+          <a:lstStyle/>
+          <a:p>
+            <a:pPr algn="ctr"/>
+          </a:p>
+        </p:txBody>
+      </p:sp>
+      <p:sp>
+        <p:nvSpPr>
+          <p:cNvPr id="5" name="TextBox 4"/>
           <p:cNvSpPr txBox="1"/>
           <p:nvPr/>
         </p:nvSpPr>
         <p:spPr>
           <a:xfrm>
-            <a:off x="822960" y="1143000"/>
+            <a:off x="822960" y="1234440"/>
             <a:ext cx="10515600" cy="1097280"/>
           </a:xfrm>
           <a:prstGeom prst="rect">
@@ -7292,14 +8145,14 @@
       </p:sp>
       <p:sp>
         <p:nvSpPr>
-          <p:cNvPr id="5" name="TextBox 4"/>
+          <p:cNvPr id="6" name="TextBox 5"/>
           <p:cNvSpPr txBox="1"/>
           <p:nvPr/>
         </p:nvSpPr>
         <p:spPr>
           <a:xfrm>
-            <a:off x="822960" y="2514600"/>
-            <a:ext cx="10515600" cy="2834640"/>
+            <a:off x="822960" y="2606040"/>
+            <a:ext cx="10515600" cy="2743200"/>
           </a:xfrm>
           <a:prstGeom prst="rect">
             <a:avLst/>
@@ -7320,7 +8173,7 @@
             <a:r>
               <a:rPr sz="2000" b="1" i="0">
                 <a:solidFill>
-                  <a:srgbClr val="CADCFC"/>
+                  <a:srgbClr val="F4A24C"/>
                 </a:solidFill>
                 <a:latin typeface="Montserrat"/>
               </a:rPr>
@@ -7345,7 +8198,7 @@
             <a:r>
               <a:rPr sz="2000" b="1" i="0">
                 <a:solidFill>
-                  <a:srgbClr val="CADCFC"/>
+                  <a:srgbClr val="F4A24C"/>
                 </a:solidFill>
                 <a:latin typeface="Montserrat"/>
               </a:rPr>
@@ -7370,7 +8223,7 @@
             <a:r>
               <a:rPr sz="2000" b="1" i="0">
                 <a:solidFill>
-                  <a:srgbClr val="CADCFC"/>
+                  <a:srgbClr val="F4A24C"/>
                 </a:solidFill>
                 <a:latin typeface="Montserrat"/>
               </a:rPr>
@@ -7395,7 +8248,7 @@
             <a:r>
               <a:rPr sz="2000" b="1" i="0">
                 <a:solidFill>
-                  <a:srgbClr val="CADCFC"/>
+                  <a:srgbClr val="F4A24C"/>
                 </a:solidFill>
                 <a:latin typeface="Montserrat"/>
               </a:rPr>
@@ -7415,20 +8268,20 @@
       </p:sp>
       <p:sp>
         <p:nvSpPr>
-          <p:cNvPr id="6" name="Rounded Rectangle 5"/>
+          <p:cNvPr id="7" name="Rounded Rectangle 6"/>
           <p:cNvSpPr/>
           <p:nvPr/>
         </p:nvSpPr>
         <p:spPr>
           <a:xfrm>
             <a:off x="822960" y="5532120"/>
-            <a:ext cx="10515600" cy="777240"/>
+            <a:ext cx="10515600" cy="822960"/>
           </a:xfrm>
           <a:prstGeom prst="roundRect">
             <a:avLst/>
           </a:prstGeom>
           <a:solidFill>
-            <a:srgbClr val="2E3A80"/>
+            <a:srgbClr val="E8801A"/>
           </a:solidFill>
           <a:ln>
             <a:noFill/>
@@ -7459,13 +8312,13 @@
       </p:sp>
       <p:sp>
         <p:nvSpPr>
-          <p:cNvPr id="7" name="TextBox 6"/>
+          <p:cNvPr id="8" name="TextBox 7"/>
           <p:cNvSpPr txBox="1"/>
           <p:nvPr/>
         </p:nvSpPr>
         <p:spPr>
           <a:xfrm>
-            <a:off x="1051560" y="5605272"/>
+            <a:off x="1051560" y="5623560"/>
             <a:ext cx="10058400" cy="640080"/>
           </a:xfrm>
           <a:prstGeom prst="rect">
@@ -7482,7 +8335,7 @@
             <a:r>
               <a:rPr sz="1500" b="1" i="1">
                 <a:solidFill>
-                  <a:srgbClr val="CADCFC"/>
+                  <a:srgbClr val="1E2761"/>
                 </a:solidFill>
                 <a:latin typeface="Montserrat"/>
               </a:rPr>
@@ -7583,7 +8436,7 @@
                 </a:solidFill>
                 <a:latin typeface="Montserrat"/>
               </a:rPr>
-              <a:t>002 / 016</a:t>
+              <a:t>002 / 017</a:t>
             </a:r>
           </a:p>
         </p:txBody>
@@ -7647,7 +8500,7 @@
             <a:r>
               <a:rPr sz="2700" b="1" i="0">
                 <a:solidFill>
-                  <a:srgbClr val="1E2761"/>
+                  <a:srgbClr val="E8801A"/>
                 </a:solidFill>
                 <a:latin typeface="Montserrat"/>
               </a:rPr>
@@ -7659,6 +8512,50 @@
       <p:sp>
         <p:nvSpPr>
           <p:cNvPr id="6" name="Rounded Rectangle 5"/>
+          <p:cNvSpPr/>
+          <p:nvPr/>
+        </p:nvSpPr>
+        <p:spPr>
+          <a:xfrm>
+            <a:off x="868680" y="1234440"/>
+            <a:ext cx="1463040" cy="73152"/>
+          </a:xfrm>
+          <a:prstGeom prst="roundRect">
+            <a:avLst/>
+          </a:prstGeom>
+          <a:solidFill>
+            <a:srgbClr val="1E2761"/>
+          </a:solidFill>
+          <a:ln>
+            <a:noFill/>
+          </a:ln>
+          <a:effectLst/>
+        </p:spPr>
+        <p:style>
+          <a:lnRef idx="1">
+            <a:schemeClr val="accent1"/>
+          </a:lnRef>
+          <a:fillRef idx="3">
+            <a:schemeClr val="accent1"/>
+          </a:fillRef>
+          <a:effectRef idx="2">
+            <a:schemeClr val="accent1"/>
+          </a:effectRef>
+          <a:fontRef idx="minor">
+            <a:schemeClr val="lt1"/>
+          </a:fontRef>
+        </p:style>
+        <p:txBody>
+          <a:bodyPr rtlCol="0" anchor="ctr"/>
+          <a:lstStyle/>
+          <a:p>
+            <a:pPr algn="ctr"/>
+          </a:p>
+        </p:txBody>
+      </p:sp>
+      <p:sp>
+        <p:nvSpPr>
+          <p:cNvPr id="7" name="Rounded Rectangle 6"/>
           <p:cNvSpPr/>
           <p:nvPr/>
         </p:nvSpPr>
@@ -7704,7 +8601,7 @@
       </p:sp>
       <p:sp>
         <p:nvSpPr>
-          <p:cNvPr id="7" name="TextBox 6"/>
+          <p:cNvPr id="8" name="TextBox 7"/>
           <p:cNvSpPr txBox="1"/>
           <p:nvPr/>
         </p:nvSpPr>
@@ -7739,7 +8636,7 @@
       </p:sp>
       <p:sp>
         <p:nvSpPr>
-          <p:cNvPr id="8" name="TextBox 7"/>
+          <p:cNvPr id="9" name="TextBox 8"/>
           <p:cNvSpPr txBox="1"/>
           <p:nvPr/>
         </p:nvSpPr>
@@ -7774,7 +8671,7 @@
       </p:sp>
       <p:sp>
         <p:nvSpPr>
-          <p:cNvPr id="9" name="Rounded Rectangle 8"/>
+          <p:cNvPr id="10" name="Rounded Rectangle 9"/>
           <p:cNvSpPr/>
           <p:nvPr/>
         </p:nvSpPr>
@@ -7820,7 +8717,7 @@
       </p:sp>
       <p:sp>
         <p:nvSpPr>
-          <p:cNvPr id="10" name="TextBox 9"/>
+          <p:cNvPr id="11" name="TextBox 10"/>
           <p:cNvSpPr txBox="1"/>
           <p:nvPr/>
         </p:nvSpPr>
@@ -7855,7 +8752,7 @@
       </p:sp>
       <p:sp>
         <p:nvSpPr>
-          <p:cNvPr id="11" name="TextBox 10"/>
+          <p:cNvPr id="12" name="TextBox 11"/>
           <p:cNvSpPr txBox="1"/>
           <p:nvPr/>
         </p:nvSpPr>
@@ -7890,7 +8787,7 @@
       </p:sp>
       <p:sp>
         <p:nvSpPr>
-          <p:cNvPr id="12" name="Rounded Rectangle 11"/>
+          <p:cNvPr id="13" name="Rounded Rectangle 12"/>
           <p:cNvSpPr/>
           <p:nvPr/>
         </p:nvSpPr>
@@ -7936,7 +8833,7 @@
       </p:sp>
       <p:sp>
         <p:nvSpPr>
-          <p:cNvPr id="13" name="TextBox 12"/>
+          <p:cNvPr id="14" name="TextBox 13"/>
           <p:cNvSpPr txBox="1"/>
           <p:nvPr/>
         </p:nvSpPr>
@@ -7971,7 +8868,7 @@
       </p:sp>
       <p:sp>
         <p:nvSpPr>
-          <p:cNvPr id="14" name="TextBox 13"/>
+          <p:cNvPr id="15" name="TextBox 14"/>
           <p:cNvSpPr txBox="1"/>
           <p:nvPr/>
         </p:nvSpPr>
@@ -8096,7 +8993,7 @@
                 </a:solidFill>
                 <a:latin typeface="Montserrat"/>
               </a:rPr>
-              <a:t>003 / 016</a:t>
+              <a:t>003 / 017</a:t>
             </a:r>
           </a:p>
         </p:txBody>
@@ -8143,7 +9040,7 @@
         </p:nvSpPr>
         <p:spPr>
           <a:xfrm>
-            <a:off x="822960" y="457200"/>
+            <a:off x="822960" y="502920"/>
             <a:ext cx="8229600" cy="365760"/>
           </a:xfrm>
           <a:prstGeom prst="rect">
@@ -8158,13 +9055,13 @@
           <a:lstStyle/>
           <a:p>
             <a:r>
-              <a:rPr sz="1200" b="1" i="0">
-                <a:solidFill>
-                  <a:srgbClr val="64748B"/>
-                </a:solidFill>
-                <a:latin typeface="Montserrat"/>
-              </a:rPr>
-              <a:t>OBJETO DE LA NORMA</a:t>
+              <a:rPr sz="1300" b="1" i="0">
+                <a:solidFill>
+                  <a:srgbClr val="E8801A"/>
+                </a:solidFill>
+                <a:latin typeface="Montserrat"/>
+              </a:rPr>
+              <a:t>PARTES DE ESTE VÍDEO</a:t>
             </a:r>
           </a:p>
         </p:txBody>
@@ -8177,7 +9074,7 @@
         </p:nvSpPr>
         <p:spPr>
           <a:xfrm>
-            <a:off x="822960" y="868680"/>
+            <a:off x="822960" y="914400"/>
             <a:ext cx="10515600" cy="914400"/>
           </a:xfrm>
           <a:prstGeom prst="rect">
@@ -8198,130 +9095,30 @@
                 </a:solidFill>
                 <a:latin typeface="Montserrat"/>
               </a:rPr>
-              <a:t>¿Qué regula la UNE 60670?</a:t>
-            </a:r>
-          </a:p>
-        </p:txBody>
-      </p:sp>
-      <p:sp>
-        <p:nvSpPr>
-          <p:cNvPr id="7" name="TextBox 6"/>
-          <p:cNvSpPr txBox="1"/>
-          <p:nvPr/>
-        </p:nvSpPr>
-        <p:spPr>
-          <a:xfrm>
-            <a:off x="822960" y="1920240"/>
-            <a:ext cx="4983480" cy="4206240"/>
-          </a:xfrm>
-          <a:prstGeom prst="rect">
-            <a:avLst/>
-          </a:prstGeom>
-          <a:noFill/>
-        </p:spPr>
-        <p:txBody>
-          <a:bodyPr wrap="square">
-            <a:spAutoFit/>
-          </a:bodyPr>
-          <a:lstStyle/>
-          <a:p>
-            <a:pPr>
-              <a:spcAft>
-                <a:spcPts val="1000"/>
-              </a:spcAft>
-            </a:pPr>
-            <a:r>
-              <a:rPr sz="1600" b="1" i="0">
-                <a:solidFill>
-                  <a:srgbClr val="2E3A80"/>
-                </a:solidFill>
-                <a:latin typeface="Montserrat"/>
-              </a:rPr>
-              <a:t>•  </a:t>
-            </a:r>
-            <a:r>
-              <a:rPr sz="1600" b="0" i="0">
-                <a:solidFill>
-                  <a:srgbClr val="1B2330"/>
-                </a:solidFill>
-                <a:latin typeface="Montserrat"/>
-              </a:rPr>
-              <a:t>Instalaciones receptoras hasta 5 bar</a:t>
-            </a:r>
-          </a:p>
-          <a:p>
-            <a:pPr>
-              <a:spcAft>
-                <a:spcPts val="1000"/>
-              </a:spcAft>
-            </a:pPr>
-            <a:r>
-              <a:rPr sz="1600" b="1" i="0">
-                <a:solidFill>
-                  <a:srgbClr val="2E3A80"/>
-                </a:solidFill>
-                <a:latin typeface="Montserrat"/>
-              </a:rPr>
-              <a:t>•  </a:t>
-            </a:r>
-            <a:r>
-              <a:rPr sz="1600" b="0" i="0">
-                <a:solidFill>
-                  <a:srgbClr val="1B2330"/>
-                </a:solidFill>
-                <a:latin typeface="Montserrat"/>
-              </a:rPr>
-              <a:t>Criterios técnicos y de seguridad</a:t>
-            </a:r>
-          </a:p>
-          <a:p>
-            <a:pPr>
-              <a:spcAft>
-                <a:spcPts val="1000"/>
-              </a:spcAft>
-            </a:pPr>
-            <a:r>
-              <a:rPr sz="1600" b="1" i="0">
-                <a:solidFill>
-                  <a:srgbClr val="2E3A80"/>
-                </a:solidFill>
-                <a:latin typeface="Montserrat"/>
-              </a:rPr>
-              <a:t>•  </a:t>
-            </a:r>
-            <a:r>
-              <a:rPr sz="1600" b="0" i="0">
-                <a:solidFill>
-                  <a:srgbClr val="1B2330"/>
-                </a:solidFill>
-                <a:latin typeface="Montserrat"/>
-              </a:rPr>
-              <a:t>Diseñar, construir, probar y poner en servicio</a:t>
-            </a:r>
-          </a:p>
-        </p:txBody>
-      </p:sp>
-      <p:sp>
-        <p:nvSpPr>
-          <p:cNvPr id="8" name="imgph" descr="IMGQ:gas boiler installation in apartment kitchen"/>
+              <a:t>En este vídeo</a:t>
+            </a:r>
+          </a:p>
+        </p:txBody>
+      </p:sp>
+      <p:sp>
+        <p:nvSpPr>
+          <p:cNvPr id="7" name="Rounded Rectangle 6"/>
           <p:cNvSpPr/>
           <p:nvPr/>
         </p:nvSpPr>
         <p:spPr>
           <a:xfrm>
-            <a:off x="5806440" y="1051560"/>
-            <a:ext cx="5298947" cy="4629150"/>
+            <a:off x="868680" y="1673352"/>
+            <a:ext cx="2011680" cy="73152"/>
           </a:xfrm>
           <a:prstGeom prst="roundRect">
             <a:avLst/>
           </a:prstGeom>
           <a:solidFill>
-            <a:srgbClr val="F3F6FB"/>
+            <a:srgbClr val="E8801A"/>
           </a:solidFill>
-          <a:ln w="12700">
-            <a:solidFill>
-              <a:srgbClr val="C7D2E6"/>
-            </a:solidFill>
+          <a:ln>
+            <a:noFill/>
           </a:ln>
           <a:effectLst/>
         </p:spPr>
@@ -8349,14 +9146,14 @@
       </p:sp>
       <p:sp>
         <p:nvSpPr>
-          <p:cNvPr id="9" name="TextBox 8"/>
+          <p:cNvPr id="8" name="TextBox 7"/>
           <p:cNvSpPr txBox="1"/>
           <p:nvPr/>
         </p:nvSpPr>
         <p:spPr>
           <a:xfrm>
-            <a:off x="6080760" y="2726055"/>
-            <a:ext cx="4750307" cy="1280160"/>
+            <a:off x="822960" y="2103120"/>
+            <a:ext cx="10515600" cy="4023360"/>
           </a:xfrm>
           <a:prstGeom prst="rect">
             <a:avLst/>
@@ -8369,27 +9166,228 @@
           </a:bodyPr>
           <a:lstStyle/>
           <a:p>
-            <a:pPr algn="ctr"/>
-            <a:r>
-              <a:rPr sz="1400" b="1" i="0">
-                <a:solidFill>
-                  <a:srgbClr val="64748B"/>
-                </a:solidFill>
-                <a:latin typeface="Montserrat"/>
-              </a:rPr>
-              <a:t>IMAGEN REALISTA</a:t>
-            </a:r>
-          </a:p>
-          <a:p>
-            <a:pPr algn="ctr"/>
-            <a:r>
-              <a:rPr sz="1100" b="0" i="1">
-                <a:solidFill>
-                  <a:srgbClr val="64748B"/>
-                </a:solidFill>
-                <a:latin typeface="Montserrat"/>
-              </a:rPr>
-              <a:t>gas boiler installation in apartment kitchen</a:t>
+            <a:pPr>
+              <a:spcAft>
+                <a:spcPts val="900"/>
+              </a:spcAft>
+            </a:pPr>
+            <a:r>
+              <a:rPr sz="1800" b="1" i="0">
+                <a:solidFill>
+                  <a:srgbClr val="E8801A"/>
+                </a:solidFill>
+                <a:latin typeface="Montserrat"/>
+              </a:rPr>
+              <a:t>01   </a:t>
+            </a:r>
+            <a:r>
+              <a:rPr sz="1700" b="0" i="0">
+                <a:solidFill>
+                  <a:srgbClr val="1B2330"/>
+                </a:solidFill>
+                <a:latin typeface="Montserrat"/>
+              </a:rPr>
+              <a:t>Objeto de la norma</a:t>
+            </a:r>
+          </a:p>
+          <a:p>
+            <a:pPr>
+              <a:spcAft>
+                <a:spcPts val="900"/>
+              </a:spcAft>
+            </a:pPr>
+            <a:r>
+              <a:rPr sz="1800" b="1" i="0">
+                <a:solidFill>
+                  <a:srgbClr val="E8801A"/>
+                </a:solidFill>
+                <a:latin typeface="Montserrat"/>
+              </a:rPr>
+              <a:t>02   </a:t>
+            </a:r>
+            <a:r>
+              <a:rPr sz="1700" b="0" i="0">
+                <a:solidFill>
+                  <a:srgbClr val="1B2330"/>
+                </a:solidFill>
+                <a:latin typeface="Montserrat"/>
+              </a:rPr>
+              <a:t>Estructura de la norma</a:t>
+            </a:r>
+          </a:p>
+          <a:p>
+            <a:pPr>
+              <a:spcAft>
+                <a:spcPts val="900"/>
+              </a:spcAft>
+            </a:pPr>
+            <a:r>
+              <a:rPr sz="1800" b="1" i="0">
+                <a:solidFill>
+                  <a:srgbClr val="E8801A"/>
+                </a:solidFill>
+                <a:latin typeface="Montserrat"/>
+              </a:rPr>
+              <a:t>03   </a:t>
+            </a:r>
+            <a:r>
+              <a:rPr sz="1700" b="0" i="0">
+                <a:solidFill>
+                  <a:srgbClr val="1B2330"/>
+                </a:solidFill>
+                <a:latin typeface="Montserrat"/>
+              </a:rPr>
+              <a:t>Parte 4</a:t>
+            </a:r>
+          </a:p>
+          <a:p>
+            <a:pPr>
+              <a:spcAft>
+                <a:spcPts val="900"/>
+              </a:spcAft>
+            </a:pPr>
+            <a:r>
+              <a:rPr sz="1800" b="1" i="0">
+                <a:solidFill>
+                  <a:srgbClr val="E8801A"/>
+                </a:solidFill>
+                <a:latin typeface="Montserrat"/>
+              </a:rPr>
+              <a:t>04   </a:t>
+            </a:r>
+            <a:r>
+              <a:rPr sz="1700" b="0" i="0">
+                <a:solidFill>
+                  <a:srgbClr val="1B2330"/>
+                </a:solidFill>
+                <a:latin typeface="Montserrat"/>
+              </a:rPr>
+              <a:t>Novedades de esta edición</a:t>
+            </a:r>
+          </a:p>
+          <a:p>
+            <a:pPr>
+              <a:spcAft>
+                <a:spcPts val="900"/>
+              </a:spcAft>
+            </a:pPr>
+            <a:r>
+              <a:rPr sz="1800" b="1" i="0">
+                <a:solidFill>
+                  <a:srgbClr val="E8801A"/>
+                </a:solidFill>
+                <a:latin typeface="Montserrat"/>
+              </a:rPr>
+              <a:t>05   </a:t>
+            </a:r>
+            <a:r>
+              <a:rPr sz="1700" b="0" i="0">
+                <a:solidFill>
+                  <a:srgbClr val="1B2330"/>
+                </a:solidFill>
+                <a:latin typeface="Montserrat"/>
+              </a:rPr>
+              <a:t>Apartado 3.1</a:t>
+            </a:r>
+          </a:p>
+          <a:p>
+            <a:pPr>
+              <a:spcAft>
+                <a:spcPts val="900"/>
+              </a:spcAft>
+            </a:pPr>
+            <a:r>
+              <a:rPr sz="1800" b="1" i="0">
+                <a:solidFill>
+                  <a:srgbClr val="E8801A"/>
+                </a:solidFill>
+                <a:latin typeface="Montserrat"/>
+              </a:rPr>
+              <a:t>06   </a:t>
+            </a:r>
+            <a:r>
+              <a:rPr sz="1700" b="0" i="0">
+                <a:solidFill>
+                  <a:srgbClr val="1B2330"/>
+                </a:solidFill>
+                <a:latin typeface="Montserrat"/>
+              </a:rPr>
+              <a:t>Apartado 3.2</a:t>
+            </a:r>
+          </a:p>
+          <a:p>
+            <a:pPr>
+              <a:spcAft>
+                <a:spcPts val="900"/>
+              </a:spcAft>
+            </a:pPr>
+            <a:r>
+              <a:rPr sz="1800" b="1" i="0">
+                <a:solidFill>
+                  <a:srgbClr val="E8801A"/>
+                </a:solidFill>
+                <a:latin typeface="Montserrat"/>
+              </a:rPr>
+              <a:t>07   </a:t>
+            </a:r>
+            <a:r>
+              <a:rPr sz="1700" b="0" i="0">
+                <a:solidFill>
+                  <a:srgbClr val="1B2330"/>
+                </a:solidFill>
+                <a:latin typeface="Montserrat"/>
+              </a:rPr>
+              <a:t>Apartado 3.3</a:t>
+            </a:r>
+          </a:p>
+          <a:p>
+            <a:pPr>
+              <a:spcAft>
+                <a:spcPts val="900"/>
+              </a:spcAft>
+            </a:pPr>
+            <a:r>
+              <a:rPr sz="1800" b="1" i="0">
+                <a:solidFill>
+                  <a:srgbClr val="E8801A"/>
+                </a:solidFill>
+                <a:latin typeface="Montserrat"/>
+              </a:rPr>
+              <a:t>08   </a:t>
+            </a:r>
+            <a:r>
+              <a:rPr sz="1700" b="0" i="0">
+                <a:solidFill>
+                  <a:srgbClr val="1B2330"/>
+                </a:solidFill>
+                <a:latin typeface="Montserrat"/>
+              </a:rPr>
+              <a:t>Apartado 3.4</a:t>
+            </a:r>
+          </a:p>
+          <a:p>
+            <a:pPr>
+              <a:spcAft>
+                <a:spcPts val="900"/>
+              </a:spcAft>
+            </a:pPr>
+            <a:r>
+              <a:rPr sz="1800" b="1" i="0">
+                <a:solidFill>
+                  <a:srgbClr val="E8801A"/>
+                </a:solidFill>
+                <a:latin typeface="Montserrat"/>
+              </a:rPr>
+              <a:t>09   </a:t>
+            </a:r>
+            <a:r>
+              <a:rPr sz="1700" b="0" i="0">
+                <a:solidFill>
+                  <a:srgbClr val="1B2330"/>
+                </a:solidFill>
+                <a:latin typeface="Montserrat"/>
+              </a:rPr>
+              <a:t>Apartado 3.5</a:t>
             </a:r>
           </a:p>
         </p:txBody>
@@ -8486,7 +9484,7 @@
                 </a:solidFill>
                 <a:latin typeface="Montserrat"/>
               </a:rPr>
-              <a:t>004 / 016</a:t>
+              <a:t>004 / 017</a:t>
             </a:r>
           </a:p>
         </p:txBody>
@@ -8534,7 +9532,7 @@
         <p:spPr>
           <a:xfrm>
             <a:off x="822960" y="457200"/>
-            <a:ext cx="8229600" cy="365760"/>
+            <a:ext cx="10058400" cy="365760"/>
           </a:xfrm>
           <a:prstGeom prst="rect">
             <a:avLst/>
@@ -8548,13 +9546,13 @@
           <a:lstStyle/>
           <a:p>
             <a:r>
-              <a:rPr sz="1200" b="1" i="0">
-                <a:solidFill>
-                  <a:srgbClr val="64748B"/>
-                </a:solidFill>
-                <a:latin typeface="Montserrat"/>
-              </a:rPr>
-              <a:t>ESTRUCTURA DE LA NORMA</a:t>
+              <a:rPr sz="1300" b="1" i="0">
+                <a:solidFill>
+                  <a:srgbClr val="E8801A"/>
+                </a:solidFill>
+                <a:latin typeface="Montserrat"/>
+              </a:rPr>
+              <a:t>OBJETO DE LA NORMA</a:t>
             </a:r>
           </a:p>
         </p:txBody>
@@ -8582,26 +9580,70 @@
           <a:lstStyle/>
           <a:p>
             <a:r>
-              <a:rPr sz="2700" b="1" i="0">
+              <a:rPr sz="2800" b="1" i="0">
                 <a:solidFill>
                   <a:srgbClr val="1E2761"/>
                 </a:solidFill>
                 <a:latin typeface="Montserrat"/>
               </a:rPr>
-              <a:t>Trece partes, una por fase</a:t>
-            </a:r>
-          </a:p>
-        </p:txBody>
-      </p:sp>
-      <p:sp>
-        <p:nvSpPr>
-          <p:cNvPr id="7" name="TextBox 6"/>
+              <a:t>¿Qué regula la UNE 60670?</a:t>
+            </a:r>
+          </a:p>
+        </p:txBody>
+      </p:sp>
+      <p:sp>
+        <p:nvSpPr>
+          <p:cNvPr id="7" name="Rounded Rectangle 6"/>
+          <p:cNvSpPr/>
+          <p:nvPr/>
+        </p:nvSpPr>
+        <p:spPr>
+          <a:xfrm>
+            <a:off x="868680" y="1627632"/>
+            <a:ext cx="2011680" cy="73152"/>
+          </a:xfrm>
+          <a:prstGeom prst="roundRect">
+            <a:avLst/>
+          </a:prstGeom>
+          <a:solidFill>
+            <a:srgbClr val="E8801A"/>
+          </a:solidFill>
+          <a:ln>
+            <a:noFill/>
+          </a:ln>
+          <a:effectLst/>
+        </p:spPr>
+        <p:style>
+          <a:lnRef idx="1">
+            <a:schemeClr val="accent1"/>
+          </a:lnRef>
+          <a:fillRef idx="3">
+            <a:schemeClr val="accent1"/>
+          </a:fillRef>
+          <a:effectRef idx="2">
+            <a:schemeClr val="accent1"/>
+          </a:effectRef>
+          <a:fontRef idx="minor">
+            <a:schemeClr val="lt1"/>
+          </a:fontRef>
+        </p:style>
+        <p:txBody>
+          <a:bodyPr rtlCol="0" anchor="ctr"/>
+          <a:lstStyle/>
+          <a:p>
+            <a:pPr algn="ctr"/>
+          </a:p>
+        </p:txBody>
+      </p:sp>
+      <p:sp>
+        <p:nvSpPr>
+          <p:cNvPr id="8" name="TextBox 7"/>
           <p:cNvSpPr txBox="1"/>
           <p:nvPr/>
         </p:nvSpPr>
         <p:spPr>
           <a:xfrm>
-            <a:off x="822960" y="1920240"/>
+            <a:off x="822960" y="1965960"/>
             <a:ext cx="4983480" cy="4206240"/>
           </a:xfrm>
           <a:prstGeom prst="rect">
@@ -8617,17 +9659,17 @@
           <a:p>
             <a:pPr>
               <a:spcAft>
-                <a:spcPts val="1000"/>
+                <a:spcPts val="1100"/>
               </a:spcAft>
             </a:pPr>
             <a:r>
               <a:rPr sz="1600" b="1" i="0">
                 <a:solidFill>
-                  <a:srgbClr val="2E3A80"/>
-                </a:solidFill>
-                <a:latin typeface="Montserrat"/>
-              </a:rPr>
-              <a:t>•  </a:t>
+                  <a:srgbClr val="E8801A"/>
+                </a:solidFill>
+                <a:latin typeface="Montserrat"/>
+              </a:rPr>
+              <a:t>▸  </a:t>
             </a:r>
             <a:r>
               <a:rPr sz="1600" b="0" i="0">
@@ -8636,23 +9678,23 @@
                 </a:solidFill>
                 <a:latin typeface="Montserrat"/>
               </a:rPr>
-              <a:t>Parte 3: tuberías, accesorios y uniones</a:t>
+              <a:t>Instalaciones receptoras hasta 5 bar</a:t>
             </a:r>
           </a:p>
           <a:p>
             <a:pPr>
               <a:spcAft>
-                <a:spcPts val="1000"/>
+                <a:spcPts val="1100"/>
               </a:spcAft>
             </a:pPr>
             <a:r>
               <a:rPr sz="1600" b="1" i="0">
                 <a:solidFill>
-                  <a:srgbClr val="2E3A80"/>
-                </a:solidFill>
-                <a:latin typeface="Montserrat"/>
-              </a:rPr>
-              <a:t>•  </a:t>
+                  <a:srgbClr val="E8801A"/>
+                </a:solidFill>
+                <a:latin typeface="Montserrat"/>
+              </a:rPr>
+              <a:t>▸  </a:t>
             </a:r>
             <a:r>
               <a:rPr sz="1600" b="0" i="0">
@@ -8661,23 +9703,23 @@
                 </a:solidFill>
                 <a:latin typeface="Montserrat"/>
               </a:rPr>
-              <a:t>Parte 4: diseño y construcción</a:t>
+              <a:t>Criterios técnicos y de seguridad</a:t>
             </a:r>
           </a:p>
           <a:p>
             <a:pPr>
               <a:spcAft>
-                <a:spcPts val="1000"/>
+                <a:spcPts val="1100"/>
               </a:spcAft>
             </a:pPr>
             <a:r>
               <a:rPr sz="1600" b="1" i="0">
                 <a:solidFill>
-                  <a:srgbClr val="2E3A80"/>
-                </a:solidFill>
-                <a:latin typeface="Montserrat"/>
-              </a:rPr>
-              <a:t>•  </a:t>
+                  <a:srgbClr val="E8801A"/>
+                </a:solidFill>
+                <a:latin typeface="Montserrat"/>
+              </a:rPr>
+              <a:t>▸  </a:t>
             </a:r>
             <a:r>
               <a:rPr sz="1600" b="0" i="0">
@@ -8686,14 +9728,14 @@
                 </a:solidFill>
                 <a:latin typeface="Montserrat"/>
               </a:rPr>
-              <a:t>Partes 8 y 9: pruebas y puesta en servicio</a:t>
-            </a:r>
-          </a:p>
-        </p:txBody>
-      </p:sp>
-      <p:sp>
-        <p:nvSpPr>
-          <p:cNvPr id="8" name="imgph" descr="IMGQ:technical standard document binder on desk"/>
+              <a:t>Diseñar, construir, probar y poner en servicio</a:t>
+            </a:r>
+          </a:p>
+        </p:txBody>
+      </p:sp>
+      <p:sp>
+        <p:nvSpPr>
+          <p:cNvPr id="9" name="imgph" descr="IMGQ:gas boiler installation in apartment kitchen"/>
           <p:cNvSpPr/>
           <p:nvPr/>
         </p:nvSpPr>
@@ -8739,7 +9781,7 @@
       </p:sp>
       <p:sp>
         <p:nvSpPr>
-          <p:cNvPr id="9" name="TextBox 8"/>
+          <p:cNvPr id="10" name="TextBox 9"/>
           <p:cNvSpPr txBox="1"/>
           <p:nvPr/>
         </p:nvSpPr>
@@ -8779,7 +9821,7 @@
                 </a:solidFill>
                 <a:latin typeface="Montserrat"/>
               </a:rPr>
-              <a:t>technical standard document binder on desk</a:t>
+              <a:t>gas boiler installation in apartment kitchen</a:t>
             </a:r>
           </a:p>
         </p:txBody>
@@ -8876,7 +9918,7 @@
                 </a:solidFill>
                 <a:latin typeface="Montserrat"/>
               </a:rPr>
-              <a:t>005 / 016</a:t>
+              <a:t>005 / 017</a:t>
             </a:r>
           </a:p>
         </p:txBody>
@@ -8924,7 +9966,7 @@
         <p:spPr>
           <a:xfrm>
             <a:off x="822960" y="457200"/>
-            <a:ext cx="8229600" cy="365760"/>
+            <a:ext cx="10058400" cy="365760"/>
           </a:xfrm>
           <a:prstGeom prst="rect">
             <a:avLst/>
@@ -8938,13 +9980,13 @@
           <a:lstStyle/>
           <a:p>
             <a:r>
-              <a:rPr sz="1200" b="1" i="0">
-                <a:solidFill>
-                  <a:srgbClr val="64748B"/>
-                </a:solidFill>
-                <a:latin typeface="Montserrat"/>
-              </a:rPr>
-              <a:t>PARTE 4 · DISEÑO Y CONSTRUCCIÓN</a:t>
+              <a:rPr sz="1300" b="1" i="0">
+                <a:solidFill>
+                  <a:srgbClr val="E8801A"/>
+                </a:solidFill>
+                <a:latin typeface="Montserrat"/>
+              </a:rPr>
+              <a:t>ESTRUCTURA DE LA NORMA</a:t>
             </a:r>
           </a:p>
         </p:txBody>
@@ -8972,26 +10014,70 @@
           <a:lstStyle/>
           <a:p>
             <a:r>
-              <a:rPr sz="2700" b="1" i="0">
+              <a:rPr sz="2800" b="1" i="0">
                 <a:solidFill>
                   <a:srgbClr val="1E2761"/>
                 </a:solidFill>
                 <a:latin typeface="Montserrat"/>
               </a:rPr>
-              <a:t>El cómo y el por dónde del tubo</a:t>
-            </a:r>
-          </a:p>
-        </p:txBody>
-      </p:sp>
-      <p:sp>
-        <p:nvSpPr>
-          <p:cNvPr id="7" name="TextBox 6"/>
+              <a:t>Trece partes, una por fase</a:t>
+            </a:r>
+          </a:p>
+        </p:txBody>
+      </p:sp>
+      <p:sp>
+        <p:nvSpPr>
+          <p:cNvPr id="7" name="Rounded Rectangle 6"/>
+          <p:cNvSpPr/>
+          <p:nvPr/>
+        </p:nvSpPr>
+        <p:spPr>
+          <a:xfrm>
+            <a:off x="868680" y="1627632"/>
+            <a:ext cx="2011680" cy="73152"/>
+          </a:xfrm>
+          <a:prstGeom prst="roundRect">
+            <a:avLst/>
+          </a:prstGeom>
+          <a:solidFill>
+            <a:srgbClr val="E8801A"/>
+          </a:solidFill>
+          <a:ln>
+            <a:noFill/>
+          </a:ln>
+          <a:effectLst/>
+        </p:spPr>
+        <p:style>
+          <a:lnRef idx="1">
+            <a:schemeClr val="accent1"/>
+          </a:lnRef>
+          <a:fillRef idx="3">
+            <a:schemeClr val="accent1"/>
+          </a:fillRef>
+          <a:effectRef idx="2">
+            <a:schemeClr val="accent1"/>
+          </a:effectRef>
+          <a:fontRef idx="minor">
+            <a:schemeClr val="lt1"/>
+          </a:fontRef>
+        </p:style>
+        <p:txBody>
+          <a:bodyPr rtlCol="0" anchor="ctr"/>
+          <a:lstStyle/>
+          <a:p>
+            <a:pPr algn="ctr"/>
+          </a:p>
+        </p:txBody>
+      </p:sp>
+      <p:sp>
+        <p:nvSpPr>
+          <p:cNvPr id="8" name="TextBox 7"/>
           <p:cNvSpPr txBox="1"/>
           <p:nvPr/>
         </p:nvSpPr>
         <p:spPr>
           <a:xfrm>
-            <a:off x="822960" y="1920240"/>
+            <a:off x="822960" y="1965960"/>
             <a:ext cx="4983480" cy="4206240"/>
           </a:xfrm>
           <a:prstGeom prst="rect">
@@ -9007,17 +10093,17 @@
           <a:p>
             <a:pPr>
               <a:spcAft>
-                <a:spcPts val="1000"/>
+                <a:spcPts val="1100"/>
               </a:spcAft>
             </a:pPr>
             <a:r>
               <a:rPr sz="1600" b="1" i="0">
                 <a:solidFill>
-                  <a:srgbClr val="2E3A80"/>
-                </a:solidFill>
-                <a:latin typeface="Montserrat"/>
-              </a:rPr>
-              <a:t>•  </a:t>
+                  <a:srgbClr val="E8801A"/>
+                </a:solidFill>
+                <a:latin typeface="Montserrat"/>
+              </a:rPr>
+              <a:t>▸  </a:t>
             </a:r>
             <a:r>
               <a:rPr sz="1600" b="0" i="0">
@@ -9026,23 +10112,23 @@
                 </a:solidFill>
                 <a:latin typeface="Montserrat"/>
               </a:rPr>
-              <a:t>Parte 3: con qué materiales</a:t>
+              <a:t>Parte 3: tuberías, accesorios y uniones</a:t>
             </a:r>
           </a:p>
           <a:p>
             <a:pPr>
               <a:spcAft>
-                <a:spcPts val="1000"/>
+                <a:spcPts val="1100"/>
               </a:spcAft>
             </a:pPr>
             <a:r>
               <a:rPr sz="1600" b="1" i="0">
                 <a:solidFill>
-                  <a:srgbClr val="2E3A80"/>
-                </a:solidFill>
-                <a:latin typeface="Montserrat"/>
-              </a:rPr>
-              <a:t>•  </a:t>
+                  <a:srgbClr val="E8801A"/>
+                </a:solidFill>
+                <a:latin typeface="Montserrat"/>
+              </a:rPr>
+              <a:t>▸  </a:t>
             </a:r>
             <a:r>
               <a:rPr sz="1600" b="0" i="0">
@@ -9051,23 +10137,23 @@
                 </a:solidFill>
                 <a:latin typeface="Montserrat"/>
               </a:rPr>
-              <a:t>Parte 4: cómo montar y por dónde</a:t>
+              <a:t>Parte 4: diseño y construcción</a:t>
             </a:r>
           </a:p>
           <a:p>
             <a:pPr>
               <a:spcAft>
-                <a:spcPts val="1000"/>
+                <a:spcPts val="1100"/>
               </a:spcAft>
             </a:pPr>
             <a:r>
               <a:rPr sz="1600" b="1" i="0">
                 <a:solidFill>
-                  <a:srgbClr val="2E3A80"/>
-                </a:solidFill>
-                <a:latin typeface="Montserrat"/>
-              </a:rPr>
-              <a:t>•  </a:t>
+                  <a:srgbClr val="E8801A"/>
+                </a:solidFill>
+                <a:latin typeface="Montserrat"/>
+              </a:rPr>
+              <a:t>▸  </a:t>
             </a:r>
             <a:r>
               <a:rPr sz="1600" b="0" i="0">
@@ -9076,14 +10162,14 @@
                 </a:solidFill>
                 <a:latin typeface="Montserrat"/>
               </a:rPr>
-              <a:t>Directrices de diseño y trazado</a:t>
-            </a:r>
-          </a:p>
-        </p:txBody>
-      </p:sp>
-      <p:sp>
-        <p:nvSpPr>
-          <p:cNvPr id="8" name="imgph" descr="IMGQ:copper gas pipe installed along wall"/>
+              <a:t>Partes 8 y 9: pruebas y puesta en servicio</a:t>
+            </a:r>
+          </a:p>
+        </p:txBody>
+      </p:sp>
+      <p:sp>
+        <p:nvSpPr>
+          <p:cNvPr id="9" name="imgph" descr="IMGQ:technical standard document binder on desk"/>
           <p:cNvSpPr/>
           <p:nvPr/>
         </p:nvSpPr>
@@ -9129,7 +10215,7 @@
       </p:sp>
       <p:sp>
         <p:nvSpPr>
-          <p:cNvPr id="9" name="TextBox 8"/>
+          <p:cNvPr id="10" name="TextBox 9"/>
           <p:cNvSpPr txBox="1"/>
           <p:nvPr/>
         </p:nvSpPr>
@@ -9169,7 +10255,7 @@
                 </a:solidFill>
                 <a:latin typeface="Montserrat"/>
               </a:rPr>
-              <a:t>copper gas pipe installed along wall</a:t>
+              <a:t>technical standard document binder on desk</a:t>
             </a:r>
           </a:p>
         </p:txBody>
@@ -9266,7 +10352,7 @@
                 </a:solidFill>
                 <a:latin typeface="Montserrat"/>
               </a:rPr>
-              <a:t>006 / 016</a:t>
+              <a:t>006 / 017</a:t>
             </a:r>
           </a:p>
         </p:txBody>
@@ -9314,7 +10400,7 @@
         <p:spPr>
           <a:xfrm>
             <a:off x="822960" y="457200"/>
-            <a:ext cx="8229600" cy="365760"/>
+            <a:ext cx="10058400" cy="365760"/>
           </a:xfrm>
           <a:prstGeom prst="rect">
             <a:avLst/>
@@ -9328,13 +10414,13 @@
           <a:lstStyle/>
           <a:p>
             <a:r>
-              <a:rPr sz="1200" b="1" i="0">
-                <a:solidFill>
-                  <a:srgbClr val="64748B"/>
-                </a:solidFill>
-                <a:latin typeface="Montserrat"/>
-              </a:rPr>
-              <a:t>NOVEDADES DE ESTA EDICIÓN</a:t>
+              <a:rPr sz="1300" b="1" i="0">
+                <a:solidFill>
+                  <a:srgbClr val="E8801A"/>
+                </a:solidFill>
+                <a:latin typeface="Montserrat"/>
+              </a:rPr>
+              <a:t>PARTE 4 · DISEÑO Y CONSTRUCCIÓN</a:t>
             </a:r>
           </a:p>
         </p:txBody>
@@ -9362,26 +10448,70 @@
           <a:lstStyle/>
           <a:p>
             <a:r>
-              <a:rPr sz="2700" b="1" i="0">
+              <a:rPr sz="2800" b="1" i="0">
                 <a:solidFill>
                   <a:srgbClr val="1E2761"/>
                 </a:solidFill>
                 <a:latin typeface="Montserrat"/>
               </a:rPr>
-              <a:t>Lo que más se pregunta ahora</a:t>
-            </a:r>
-          </a:p>
-        </p:txBody>
-      </p:sp>
-      <p:sp>
-        <p:nvSpPr>
-          <p:cNvPr id="7" name="TextBox 6"/>
+              <a:t>El cómo y el por dónde del tubo</a:t>
+            </a:r>
+          </a:p>
+        </p:txBody>
+      </p:sp>
+      <p:sp>
+        <p:nvSpPr>
+          <p:cNvPr id="7" name="Rounded Rectangle 6"/>
+          <p:cNvSpPr/>
+          <p:nvPr/>
+        </p:nvSpPr>
+        <p:spPr>
+          <a:xfrm>
+            <a:off x="868680" y="1627632"/>
+            <a:ext cx="2011680" cy="73152"/>
+          </a:xfrm>
+          <a:prstGeom prst="roundRect">
+            <a:avLst/>
+          </a:prstGeom>
+          <a:solidFill>
+            <a:srgbClr val="E8801A"/>
+          </a:solidFill>
+          <a:ln>
+            <a:noFill/>
+          </a:ln>
+          <a:effectLst/>
+        </p:spPr>
+        <p:style>
+          <a:lnRef idx="1">
+            <a:schemeClr val="accent1"/>
+          </a:lnRef>
+          <a:fillRef idx="3">
+            <a:schemeClr val="accent1"/>
+          </a:fillRef>
+          <a:effectRef idx="2">
+            <a:schemeClr val="accent1"/>
+          </a:effectRef>
+          <a:fontRef idx="minor">
+            <a:schemeClr val="lt1"/>
+          </a:fontRef>
+        </p:style>
+        <p:txBody>
+          <a:bodyPr rtlCol="0" anchor="ctr"/>
+          <a:lstStyle/>
+          <a:p>
+            <a:pPr algn="ctr"/>
+          </a:p>
+        </p:txBody>
+      </p:sp>
+      <p:sp>
+        <p:nvSpPr>
+          <p:cNvPr id="8" name="TextBox 7"/>
           <p:cNvSpPr txBox="1"/>
           <p:nvPr/>
         </p:nvSpPr>
         <p:spPr>
           <a:xfrm>
-            <a:off x="822960" y="1920240"/>
+            <a:off x="822960" y="1965960"/>
             <a:ext cx="4983480" cy="4206240"/>
           </a:xfrm>
           <a:prstGeom prst="rect">
@@ -9397,17 +10527,17 @@
           <a:p>
             <a:pPr>
               <a:spcAft>
-                <a:spcPts val="1000"/>
+                <a:spcPts val="1100"/>
               </a:spcAft>
             </a:pPr>
             <a:r>
               <a:rPr sz="1600" b="1" i="0">
                 <a:solidFill>
-                  <a:srgbClr val="2E3A80"/>
-                </a:solidFill>
-                <a:latin typeface="Montserrat"/>
-              </a:rPr>
-              <a:t>•  </a:t>
+                  <a:srgbClr val="E8801A"/>
+                </a:solidFill>
+                <a:latin typeface="Montserrat"/>
+              </a:rPr>
+              <a:t>▸  </a:t>
             </a:r>
             <a:r>
               <a:rPr sz="1600" b="0" i="0">
@@ -9416,23 +10546,23 @@
                 </a:solidFill>
                 <a:latin typeface="Montserrat"/>
               </a:rPr>
-              <a:t>Individualizar instalaciones de más de 70 kW</a:t>
+              <a:t>Parte 3: con qué materiales</a:t>
             </a:r>
           </a:p>
           <a:p>
             <a:pPr>
               <a:spcAft>
-                <a:spcPts val="1000"/>
+                <a:spcPts val="1100"/>
               </a:spcAft>
             </a:pPr>
             <a:r>
               <a:rPr sz="1600" b="1" i="0">
                 <a:solidFill>
-                  <a:srgbClr val="2E3A80"/>
-                </a:solidFill>
-                <a:latin typeface="Montserrat"/>
-              </a:rPr>
-              <a:t>•  </a:t>
+                  <a:srgbClr val="E8801A"/>
+                </a:solidFill>
+                <a:latin typeface="Montserrat"/>
+              </a:rPr>
+              <a:t>▸  </a:t>
             </a:r>
             <a:r>
               <a:rPr sz="1600" b="0" i="0">
@@ -9441,23 +10571,23 @@
                 </a:solidFill>
                 <a:latin typeface="Montserrat"/>
               </a:rPr>
-              <a:t>Empotrada = en la pared, sin vaina</a:t>
+              <a:t>Parte 4: cómo montar y por dónde</a:t>
             </a:r>
           </a:p>
           <a:p>
             <a:pPr>
               <a:spcAft>
-                <a:spcPts val="1000"/>
+                <a:spcPts val="1100"/>
               </a:spcAft>
             </a:pPr>
             <a:r>
               <a:rPr sz="1600" b="1" i="0">
                 <a:solidFill>
-                  <a:srgbClr val="2E3A80"/>
-                </a:solidFill>
-                <a:latin typeface="Montserrat"/>
-              </a:rPr>
-              <a:t>•  </a:t>
+                  <a:srgbClr val="E8801A"/>
+                </a:solidFill>
+                <a:latin typeface="Montserrat"/>
+              </a:rPr>
+              <a:t>▸  </a:t>
             </a:r>
             <a:r>
               <a:rPr sz="1600" b="0" i="0">
@@ -9466,14 +10596,14 @@
                 </a:solidFill>
                 <a:latin typeface="Montserrat"/>
               </a:rPr>
-              <a:t>Reducir los 3 cm aislando el tubo</a:t>
-            </a:r>
-          </a:p>
-        </p:txBody>
-      </p:sp>
-      <p:sp>
-        <p:nvSpPr>
-          <p:cNvPr id="8" name="imgph" descr="IMGQ:gas meter cabinet on building facade"/>
+              <a:t>Directrices de diseño y trazado</a:t>
+            </a:r>
+          </a:p>
+        </p:txBody>
+      </p:sp>
+      <p:sp>
+        <p:nvSpPr>
+          <p:cNvPr id="9" name="imgph" descr="IMGQ:copper gas pipe installed along wall"/>
           <p:cNvSpPr/>
           <p:nvPr/>
         </p:nvSpPr>
@@ -9519,7 +10649,7 @@
       </p:sp>
       <p:sp>
         <p:nvSpPr>
-          <p:cNvPr id="9" name="TextBox 8"/>
+          <p:cNvPr id="10" name="TextBox 9"/>
           <p:cNvSpPr txBox="1"/>
           <p:nvPr/>
         </p:nvSpPr>
@@ -9559,7 +10689,7 @@
                 </a:solidFill>
                 <a:latin typeface="Montserrat"/>
               </a:rPr>
-              <a:t>gas meter cabinet on building facade</a:t>
+              <a:t>copper gas pipe installed along wall</a:t>
             </a:r>
           </a:p>
         </p:txBody>
@@ -9656,7 +10786,7 @@
                 </a:solidFill>
                 <a:latin typeface="Montserrat"/>
               </a:rPr>
-              <a:t>007 / 016</a:t>
+              <a:t>007 / 017</a:t>
             </a:r>
           </a:p>
         </p:txBody>
@@ -9704,7 +10834,7 @@
         <p:spPr>
           <a:xfrm>
             <a:off x="822960" y="457200"/>
-            <a:ext cx="8229600" cy="365760"/>
+            <a:ext cx="10058400" cy="365760"/>
           </a:xfrm>
           <a:prstGeom prst="rect">
             <a:avLst/>
@@ -9718,13 +10848,13 @@
           <a:lstStyle/>
           <a:p>
             <a:r>
-              <a:rPr sz="1200" b="1" i="0">
-                <a:solidFill>
-                  <a:srgbClr val="64748B"/>
-                </a:solidFill>
-                <a:latin typeface="Montserrat"/>
-              </a:rPr>
-              <a:t>APARTADO 3.1 · DATOS DE PARTIDA</a:t>
+              <a:rPr sz="1300" b="1" i="0">
+                <a:solidFill>
+                  <a:srgbClr val="E8801A"/>
+                </a:solidFill>
+                <a:latin typeface="Montserrat"/>
+              </a:rPr>
+              <a:t>NOVEDADES DE ESTA EDICIÓN</a:t>
             </a:r>
           </a:p>
         </p:txBody>
@@ -9752,26 +10882,70 @@
           <a:lstStyle/>
           <a:p>
             <a:r>
-              <a:rPr sz="2700" b="1" i="0">
+              <a:rPr sz="2800" b="1" i="0">
                 <a:solidFill>
                   <a:srgbClr val="1E2761"/>
                 </a:solidFill>
                 <a:latin typeface="Montserrat"/>
               </a:rPr>
-              <a:t>Los siete datos que da la distribuidora</a:t>
-            </a:r>
-          </a:p>
-        </p:txBody>
-      </p:sp>
-      <p:sp>
-        <p:nvSpPr>
-          <p:cNvPr id="7" name="TextBox 6"/>
+              <a:t>Lo que más se pregunta ahora</a:t>
+            </a:r>
+          </a:p>
+        </p:txBody>
+      </p:sp>
+      <p:sp>
+        <p:nvSpPr>
+          <p:cNvPr id="7" name="Rounded Rectangle 6"/>
+          <p:cNvSpPr/>
+          <p:nvPr/>
+        </p:nvSpPr>
+        <p:spPr>
+          <a:xfrm>
+            <a:off x="868680" y="1627632"/>
+            <a:ext cx="2011680" cy="73152"/>
+          </a:xfrm>
+          <a:prstGeom prst="roundRect">
+            <a:avLst/>
+          </a:prstGeom>
+          <a:solidFill>
+            <a:srgbClr val="E8801A"/>
+          </a:solidFill>
+          <a:ln>
+            <a:noFill/>
+          </a:ln>
+          <a:effectLst/>
+        </p:spPr>
+        <p:style>
+          <a:lnRef idx="1">
+            <a:schemeClr val="accent1"/>
+          </a:lnRef>
+          <a:fillRef idx="3">
+            <a:schemeClr val="accent1"/>
+          </a:fillRef>
+          <a:effectRef idx="2">
+            <a:schemeClr val="accent1"/>
+          </a:effectRef>
+          <a:fontRef idx="minor">
+            <a:schemeClr val="lt1"/>
+          </a:fontRef>
+        </p:style>
+        <p:txBody>
+          <a:bodyPr rtlCol="0" anchor="ctr"/>
+          <a:lstStyle/>
+          <a:p>
+            <a:pPr algn="ctr"/>
+          </a:p>
+        </p:txBody>
+      </p:sp>
+      <p:sp>
+        <p:nvSpPr>
+          <p:cNvPr id="8" name="TextBox 7"/>
           <p:cNvSpPr txBox="1"/>
           <p:nvPr/>
         </p:nvSpPr>
         <p:spPr>
           <a:xfrm>
-            <a:off x="822960" y="1920240"/>
+            <a:off x="822960" y="1965960"/>
             <a:ext cx="4983480" cy="4206240"/>
           </a:xfrm>
           <a:prstGeom prst="rect">
@@ -9787,17 +10961,17 @@
           <a:p>
             <a:pPr>
               <a:spcAft>
-                <a:spcPts val="1000"/>
+                <a:spcPts val="1100"/>
               </a:spcAft>
             </a:pPr>
             <a:r>
               <a:rPr sz="1600" b="1" i="0">
                 <a:solidFill>
-                  <a:srgbClr val="2E3A80"/>
-                </a:solidFill>
-                <a:latin typeface="Montserrat"/>
-              </a:rPr>
-              <a:t>•  </a:t>
+                  <a:srgbClr val="E8801A"/>
+                </a:solidFill>
+                <a:latin typeface="Montserrat"/>
+              </a:rPr>
+              <a:t>▸  </a:t>
             </a:r>
             <a:r>
               <a:rPr sz="1600" b="0" i="0">
@@ -9806,23 +10980,23 @@
                 </a:solidFill>
                 <a:latin typeface="Montserrat"/>
               </a:rPr>
-              <a:t>Familia, denominación y Hs del gas</a:t>
+              <a:t>Individualizar instalaciones de más de 70 kW</a:t>
             </a:r>
           </a:p>
           <a:p>
             <a:pPr>
               <a:spcAft>
-                <a:spcPts val="1000"/>
+                <a:spcPts val="1100"/>
               </a:spcAft>
             </a:pPr>
             <a:r>
               <a:rPr sz="1600" b="1" i="0">
                 <a:solidFill>
-                  <a:srgbClr val="2E3A80"/>
-                </a:solidFill>
-                <a:latin typeface="Montserrat"/>
-              </a:rPr>
-              <a:t>•  </a:t>
+                  <a:srgbClr val="E8801A"/>
+                </a:solidFill>
+                <a:latin typeface="Montserrat"/>
+              </a:rPr>
+              <a:t>▸  </a:t>
             </a:r>
             <a:r>
               <a:rPr sz="1600" b="0" i="0">
@@ -9831,23 +11005,23 @@
                 </a:solidFill>
                 <a:latin typeface="Montserrat"/>
               </a:rPr>
-              <a:t>Densidades, índice de Wobbe y presiones</a:t>
+              <a:t>Empotrada = en la pared, sin vaina</a:t>
             </a:r>
           </a:p>
           <a:p>
             <a:pPr>
               <a:spcAft>
-                <a:spcPts val="1000"/>
+                <a:spcPts val="1100"/>
               </a:spcAft>
             </a:pPr>
             <a:r>
               <a:rPr sz="1600" b="1" i="0">
                 <a:solidFill>
-                  <a:srgbClr val="2E3A80"/>
-                </a:solidFill>
-                <a:latin typeface="Montserrat"/>
-              </a:rPr>
-              <a:t>•  </a:t>
+                  <a:srgbClr val="E8801A"/>
+                </a:solidFill>
+                <a:latin typeface="Montserrat"/>
+              </a:rPr>
+              <a:t>▸  </a:t>
             </a:r>
             <a:r>
               <a:rPr sz="1600" b="0" i="0">
@@ -9856,14 +11030,14 @@
                 </a:solidFill>
                 <a:latin typeface="Montserrat"/>
               </a:rPr>
-              <a:t>DN de la llave de acometida</a:t>
-            </a:r>
-          </a:p>
-        </p:txBody>
-      </p:sp>
-      <p:sp>
-        <p:nvSpPr>
-          <p:cNvPr id="8" name="imgph" descr="IMGQ:technician reading gas supply document clipboard"/>
+              <a:t>Reducir los 3 cm aislando el tubo</a:t>
+            </a:r>
+          </a:p>
+        </p:txBody>
+      </p:sp>
+      <p:sp>
+        <p:nvSpPr>
+          <p:cNvPr id="9" name="imgph" descr="IMGQ:gas meter cabinet on building facade"/>
           <p:cNvSpPr/>
           <p:nvPr/>
         </p:nvSpPr>
@@ -9909,7 +11083,7 @@
       </p:sp>
       <p:sp>
         <p:nvSpPr>
-          <p:cNvPr id="9" name="TextBox 8"/>
+          <p:cNvPr id="10" name="TextBox 9"/>
           <p:cNvSpPr txBox="1"/>
           <p:nvPr/>
         </p:nvSpPr>
@@ -9949,7 +11123,7 @@
                 </a:solidFill>
                 <a:latin typeface="Montserrat"/>
               </a:rPr>
-              <a:t>technician reading gas supply document clipboard</a:t>
+              <a:t>gas meter cabinet on building facade</a:t>
             </a:r>
           </a:p>
         </p:txBody>
@@ -10046,7 +11220,7 @@
                 </a:solidFill>
                 <a:latin typeface="Montserrat"/>
               </a:rPr>
-              <a:t>008 / 016</a:t>
+              <a:t>008 / 017</a:t>
             </a:r>
           </a:p>
         </p:txBody>
@@ -10094,7 +11268,7 @@
         <p:spPr>
           <a:xfrm>
             <a:off x="822960" y="457200"/>
-            <a:ext cx="8229600" cy="365760"/>
+            <a:ext cx="10058400" cy="365760"/>
           </a:xfrm>
           <a:prstGeom prst="rect">
             <a:avLst/>
@@ -10108,13 +11282,13 @@
           <a:lstStyle/>
           <a:p>
             <a:r>
-              <a:rPr sz="1200" b="1" i="0">
-                <a:solidFill>
-                  <a:srgbClr val="64748B"/>
-                </a:solidFill>
-                <a:latin typeface="Montserrat"/>
-              </a:rPr>
-              <a:t>APARTADO 3.2 · GRADO DE GASIFICACIÓN</a:t>
+              <a:rPr sz="1300" b="1" i="0">
+                <a:solidFill>
+                  <a:srgbClr val="E8801A"/>
+                </a:solidFill>
+                <a:latin typeface="Montserrat"/>
+              </a:rPr>
+              <a:t>APARTADO 3.1 · DATOS DE PARTIDA</a:t>
             </a:r>
           </a:p>
         </p:txBody>
@@ -10142,26 +11316,70 @@
           <a:lstStyle/>
           <a:p>
             <a:r>
-              <a:rPr sz="2700" b="1" i="0">
+              <a:rPr sz="2800" b="1" i="0">
                 <a:solidFill>
                   <a:srgbClr val="1E2761"/>
                 </a:solidFill>
                 <a:latin typeface="Montserrat"/>
               </a:rPr>
-              <a:t>Solo dos cifras: 30 y 70</a:t>
-            </a:r>
-          </a:p>
-        </p:txBody>
-      </p:sp>
-      <p:sp>
-        <p:nvSpPr>
-          <p:cNvPr id="7" name="TextBox 6"/>
+              <a:t>Los siete datos que da la distribuidora</a:t>
+            </a:r>
+          </a:p>
+        </p:txBody>
+      </p:sp>
+      <p:sp>
+        <p:nvSpPr>
+          <p:cNvPr id="7" name="Rounded Rectangle 6"/>
+          <p:cNvSpPr/>
+          <p:nvPr/>
+        </p:nvSpPr>
+        <p:spPr>
+          <a:xfrm>
+            <a:off x="868680" y="1627632"/>
+            <a:ext cx="2011680" cy="73152"/>
+          </a:xfrm>
+          <a:prstGeom prst="roundRect">
+            <a:avLst/>
+          </a:prstGeom>
+          <a:solidFill>
+            <a:srgbClr val="E8801A"/>
+          </a:solidFill>
+          <a:ln>
+            <a:noFill/>
+          </a:ln>
+          <a:effectLst/>
+        </p:spPr>
+        <p:style>
+          <a:lnRef idx="1">
+            <a:schemeClr val="accent1"/>
+          </a:lnRef>
+          <a:fillRef idx="3">
+            <a:schemeClr val="accent1"/>
+          </a:fillRef>
+          <a:effectRef idx="2">
+            <a:schemeClr val="accent1"/>
+          </a:effectRef>
+          <a:fontRef idx="minor">
+            <a:schemeClr val="lt1"/>
+          </a:fontRef>
+        </p:style>
+        <p:txBody>
+          <a:bodyPr rtlCol="0" anchor="ctr"/>
+          <a:lstStyle/>
+          <a:p>
+            <a:pPr algn="ctr"/>
+          </a:p>
+        </p:txBody>
+      </p:sp>
+      <p:sp>
+        <p:nvSpPr>
+          <p:cNvPr id="8" name="TextBox 7"/>
           <p:cNvSpPr txBox="1"/>
           <p:nvPr/>
         </p:nvSpPr>
         <p:spPr>
           <a:xfrm>
-            <a:off x="822960" y="1920240"/>
+            <a:off x="822960" y="1965960"/>
             <a:ext cx="4983480" cy="4206240"/>
           </a:xfrm>
           <a:prstGeom prst="rect">
@@ -10177,17 +11395,17 @@
           <a:p>
             <a:pPr>
               <a:spcAft>
-                <a:spcPts val="1000"/>
+                <a:spcPts val="1100"/>
               </a:spcAft>
             </a:pPr>
             <a:r>
               <a:rPr sz="1600" b="1" i="0">
                 <a:solidFill>
-                  <a:srgbClr val="2E3A80"/>
-                </a:solidFill>
-                <a:latin typeface="Montserrat"/>
-              </a:rPr>
-              <a:t>•  </a:t>
+                  <a:srgbClr val="E8801A"/>
+                </a:solidFill>
+                <a:latin typeface="Montserrat"/>
+              </a:rPr>
+              <a:t>▸  </a:t>
             </a:r>
             <a:r>
               <a:rPr sz="1600" b="0" i="0">
@@ -10196,23 +11414,23 @@
                 </a:solidFill>
                 <a:latin typeface="Montserrat"/>
               </a:rPr>
-              <a:t>Grado 1: hasta 30 kW</a:t>
+              <a:t>Familia, denominación y Hs del gas</a:t>
             </a:r>
           </a:p>
           <a:p>
             <a:pPr>
               <a:spcAft>
-                <a:spcPts val="1000"/>
+                <a:spcPts val="1100"/>
               </a:spcAft>
             </a:pPr>
             <a:r>
               <a:rPr sz="1600" b="1" i="0">
                 <a:solidFill>
-                  <a:srgbClr val="2E3A80"/>
-                </a:solidFill>
-                <a:latin typeface="Montserrat"/>
-              </a:rPr>
-              <a:t>•  </a:t>
+                  <a:srgbClr val="E8801A"/>
+                </a:solidFill>
+                <a:latin typeface="Montserrat"/>
+              </a:rPr>
+              <a:t>▸  </a:t>
             </a:r>
             <a:r>
               <a:rPr sz="1600" b="0" i="0">
@@ -10221,23 +11439,23 @@
                 </a:solidFill>
                 <a:latin typeface="Montserrat"/>
               </a:rPr>
-              <a:t>Grado 2: de 30 a 70 kW</a:t>
+              <a:t>Densidades, índice de Wobbe y presiones</a:t>
             </a:r>
           </a:p>
           <a:p>
             <a:pPr>
               <a:spcAft>
-                <a:spcPts val="1000"/>
+                <a:spcPts val="1100"/>
               </a:spcAft>
             </a:pPr>
             <a:r>
               <a:rPr sz="1600" b="1" i="0">
                 <a:solidFill>
-                  <a:srgbClr val="2E3A80"/>
-                </a:solidFill>
-                <a:latin typeface="Montserrat"/>
-              </a:rPr>
-              <a:t>•  </a:t>
+                  <a:srgbClr val="E8801A"/>
+                </a:solidFill>
+                <a:latin typeface="Montserrat"/>
+              </a:rPr>
+              <a:t>▸  </a:t>
             </a:r>
             <a:r>
               <a:rPr sz="1600" b="0" i="0">
@@ -10246,14 +11464,14 @@
                 </a:solidFill>
                 <a:latin typeface="Montserrat"/>
               </a:rPr>
-              <a:t>Grado 3: más de 70 kW</a:t>
-            </a:r>
-          </a:p>
-        </p:txBody>
-      </p:sp>
-      <p:sp>
-        <p:nvSpPr>
-          <p:cNvPr id="8" name="imgph" descr="IMGQ:residential gas boiler mounted on wall"/>
+              <a:t>DN de la llave de acometida</a:t>
+            </a:r>
+          </a:p>
+        </p:txBody>
+      </p:sp>
+      <p:sp>
+        <p:nvSpPr>
+          <p:cNvPr id="9" name="imgph" descr="IMGQ:technician reading gas supply document clipboard"/>
           <p:cNvSpPr/>
           <p:nvPr/>
         </p:nvSpPr>
@@ -10299,7 +11517,7 @@
       </p:sp>
       <p:sp>
         <p:nvSpPr>
-          <p:cNvPr id="9" name="TextBox 8"/>
+          <p:cNvPr id="10" name="TextBox 9"/>
           <p:cNvSpPr txBox="1"/>
           <p:nvPr/>
         </p:nvSpPr>
@@ -10339,7 +11557,7 @@
                 </a:solidFill>
                 <a:latin typeface="Montserrat"/>
               </a:rPr>
-              <a:t>residential gas boiler mounted on wall</a:t>
+              <a:t>technician reading gas supply document clipboard</a:t>
             </a:r>
           </a:p>
         </p:txBody>
@@ -10436,7 +11654,7 @@
                 </a:solidFill>
                 <a:latin typeface="Montserrat"/>
               </a:rPr>
-              <a:t>009 / 016</a:t>
+              <a:t>009 / 017</a:t>
             </a:r>
           </a:p>
         </p:txBody>
@@ -10484,7 +11702,7 @@
         <p:spPr>
           <a:xfrm>
             <a:off x="822960" y="457200"/>
-            <a:ext cx="8229600" cy="365760"/>
+            <a:ext cx="10058400" cy="365760"/>
           </a:xfrm>
           <a:prstGeom prst="rect">
             <a:avLst/>
@@ -10498,13 +11716,13 @@
           <a:lstStyle/>
           <a:p>
             <a:r>
-              <a:rPr sz="1200" b="1" i="0">
-                <a:solidFill>
-                  <a:srgbClr val="64748B"/>
-                </a:solidFill>
-                <a:latin typeface="Montserrat"/>
-              </a:rPr>
-              <a:t>APARTADO 3.2 · POTENCIA DE LA VIVIENDA</a:t>
+              <a:rPr sz="1300" b="1" i="0">
+                <a:solidFill>
+                  <a:srgbClr val="E8801A"/>
+                </a:solidFill>
+                <a:latin typeface="Montserrat"/>
+              </a:rPr>
+              <a:t>APARTADO 3.2 · GRADO DE GASIFICACIÓN</a:t>
             </a:r>
           </a:p>
         </p:txBody>
@@ -10532,26 +11750,70 @@
           <a:lstStyle/>
           <a:p>
             <a:r>
-              <a:rPr sz="2700" b="1" i="0">
+              <a:rPr sz="2800" b="1" i="0">
                 <a:solidFill>
                   <a:srgbClr val="1E2761"/>
                 </a:solidFill>
                 <a:latin typeface="Montserrat"/>
               </a:rPr>
-              <a:t>Los dos aparatos grandes, enteros</a:t>
-            </a:r>
-          </a:p>
-        </p:txBody>
-      </p:sp>
-      <p:sp>
-        <p:nvSpPr>
-          <p:cNvPr id="7" name="TextBox 6"/>
+              <a:t>Solo dos cifras: 30 y 70</a:t>
+            </a:r>
+          </a:p>
+        </p:txBody>
+      </p:sp>
+      <p:sp>
+        <p:nvSpPr>
+          <p:cNvPr id="7" name="Rounded Rectangle 6"/>
+          <p:cNvSpPr/>
+          <p:nvPr/>
+        </p:nvSpPr>
+        <p:spPr>
+          <a:xfrm>
+            <a:off x="868680" y="1627632"/>
+            <a:ext cx="2011680" cy="73152"/>
+          </a:xfrm>
+          <a:prstGeom prst="roundRect">
+            <a:avLst/>
+          </a:prstGeom>
+          <a:solidFill>
+            <a:srgbClr val="E8801A"/>
+          </a:solidFill>
+          <a:ln>
+            <a:noFill/>
+          </a:ln>
+          <a:effectLst/>
+        </p:spPr>
+        <p:style>
+          <a:lnRef idx="1">
+            <a:schemeClr val="accent1"/>
+          </a:lnRef>
+          <a:fillRef idx="3">
+            <a:schemeClr val="accent1"/>
+          </a:fillRef>
+          <a:effectRef idx="2">
+            <a:schemeClr val="accent1"/>
+          </a:effectRef>
+          <a:fontRef idx="minor">
+            <a:schemeClr val="lt1"/>
+          </a:fontRef>
+        </p:style>
+        <p:txBody>
+          <a:bodyPr rtlCol="0" anchor="ctr"/>
+          <a:lstStyle/>
+          <a:p>
+            <a:pPr algn="ctr"/>
+          </a:p>
+        </p:txBody>
+      </p:sp>
+      <p:sp>
+        <p:nvSpPr>
+          <p:cNvPr id="8" name="TextBox 7"/>
           <p:cNvSpPr txBox="1"/>
           <p:nvPr/>
         </p:nvSpPr>
         <p:spPr>
           <a:xfrm>
-            <a:off x="822960" y="1920240"/>
+            <a:off x="822960" y="1965960"/>
             <a:ext cx="4983480" cy="4206240"/>
           </a:xfrm>
           <a:prstGeom prst="rect">
@@ -10567,17 +11829,17 @@
           <a:p>
             <a:pPr>
               <a:spcAft>
-                <a:spcPts val="1000"/>
+                <a:spcPts val="1100"/>
               </a:spcAft>
             </a:pPr>
             <a:r>
               <a:rPr sz="1600" b="1" i="0">
                 <a:solidFill>
-                  <a:srgbClr val="2E3A80"/>
-                </a:solidFill>
-                <a:latin typeface="Montserrat"/>
-              </a:rPr>
-              <a:t>•  </a:t>
+                  <a:srgbClr val="E8801A"/>
+                </a:solidFill>
+                <a:latin typeface="Montserrat"/>
+              </a:rPr>
+              <a:t>▸  </a:t>
             </a:r>
             <a:r>
               <a:rPr sz="1600" b="0" i="0">
@@ -10586,23 +11848,23 @@
                 </a:solidFill>
                 <a:latin typeface="Montserrat"/>
               </a:rPr>
-              <a:t>Los dos mayores cuentan enteros</a:t>
+              <a:t>Grado 1: hasta 30 kW</a:t>
             </a:r>
           </a:p>
           <a:p>
             <a:pPr>
               <a:spcAft>
-                <a:spcPts val="1000"/>
+                <a:spcPts val="1100"/>
               </a:spcAft>
             </a:pPr>
             <a:r>
               <a:rPr sz="1600" b="1" i="0">
                 <a:solidFill>
-                  <a:srgbClr val="2E3A80"/>
-                </a:solidFill>
-                <a:latin typeface="Montserrat"/>
-              </a:rPr>
-              <a:t>•  </a:t>
+                  <a:srgbClr val="E8801A"/>
+                </a:solidFill>
+                <a:latin typeface="Montserrat"/>
+              </a:rPr>
+              <a:t>▸  </a:t>
             </a:r>
             <a:r>
               <a:rPr sz="1600" b="0" i="0">
@@ -10611,23 +11873,23 @@
                 </a:solidFill>
                 <a:latin typeface="Montserrat"/>
               </a:rPr>
-              <a:t>El resto, dividido entre 2</a:t>
+              <a:t>Grado 2: de 30 a 70 kW</a:t>
             </a:r>
           </a:p>
           <a:p>
             <a:pPr>
               <a:spcAft>
-                <a:spcPts val="1000"/>
+                <a:spcPts val="1100"/>
               </a:spcAft>
             </a:pPr>
             <a:r>
               <a:rPr sz="1600" b="1" i="0">
                 <a:solidFill>
-                  <a:srgbClr val="2E3A80"/>
-                </a:solidFill>
-                <a:latin typeface="Montserrat"/>
-              </a:rPr>
-              <a:t>•  </a:t>
+                  <a:srgbClr val="E8801A"/>
+                </a:solidFill>
+                <a:latin typeface="Montserrat"/>
+              </a:rPr>
+              <a:t>▸  </a:t>
             </a:r>
             <a:r>
               <a:rPr sz="1600" b="0" i="0">
@@ -10636,14 +11898,14 @@
                 </a:solidFill>
                 <a:latin typeface="Montserrat"/>
               </a:rPr>
-              <a:t>Mínimo obligatorio: 30 kW</a:t>
-            </a:r>
-          </a:p>
-        </p:txBody>
-      </p:sp>
-      <p:sp>
-        <p:nvSpPr>
-          <p:cNvPr id="8" name="imgph" descr="IMGQ:kitchen with gas cooker and wall boiler"/>
+              <a:t>Grado 3: más de 70 kW</a:t>
+            </a:r>
+          </a:p>
+        </p:txBody>
+      </p:sp>
+      <p:sp>
+        <p:nvSpPr>
+          <p:cNvPr id="9" name="imgph" descr="IMGQ:residential gas boiler mounted on wall"/>
           <p:cNvSpPr/>
           <p:nvPr/>
         </p:nvSpPr>
@@ -10689,7 +11951,7 @@
       </p:sp>
       <p:sp>
         <p:nvSpPr>
-          <p:cNvPr id="9" name="TextBox 8"/>
+          <p:cNvPr id="10" name="TextBox 9"/>
           <p:cNvSpPr txBox="1"/>
           <p:nvPr/>
         </p:nvSpPr>
@@ -10729,7 +11991,7 @@
                 </a:solidFill>
                 <a:latin typeface="Montserrat"/>
               </a:rPr>
-              <a:t>kitchen with gas cooker and wall boiler</a:t>
+              <a:t>residential gas boiler mounted on wall</a:t>
             </a:r>
           </a:p>
         </p:txBody>

--- a/Curso Gas B/11 - UNE 60670 - Diseno y construccion/11 - UNE 60670 - Diseno y construccion - Vídeo 1.pptx
+++ b/Curso Gas B/11 - UNE 60670 - Diseno y construccion/11 - UNE 60670 - Diseno y construccion - Vídeo 1.pptx
@@ -676,12 +676,12 @@
           <a:lstStyle/>
           <a:p>
             <a:r>
-              <a:t>N1: Vamos con una rápida. Tienes sobre la mesa una instalación de sesenta y cinco kilovatios. ¿Qué grado le pones?</a:t>
-            </a:r>
-          </a:p>
-          <a:p>
-            <a:r>
-              <a:t>N2: Piensa en las dos cifras clave, treinta y setenta, y mira entre qué números cae el sesenta y cinco.</a:t>
+              <a:t>N1: Vamos con una pregunta. Escúchala entera. Una instalación individual de sesenta y cinco kilovatios, ¿qué grado de gasificación tiene? Te leo las cuatro opciones. Opción A, grado uno. Opción B, grado dos. Opción C, grado tres. Opción D, no se le asigna grado. Párala un momento y piensa tu respuesta.</a:t>
+            </a:r>
+          </a:p>
+          <a:p>
+            <a:r>
+              <a:t>N2: Una pista: acuérdate de las dos cifras clave, treinta y setenta kilovatios, y mira entre qué dos números cae el sesenta y cinco.</a:t>
             </a:r>
           </a:p>
         </p:txBody>
@@ -751,12 +751,12 @@
           <a:lstStyle/>
           <a:p>
             <a:r>
-              <a:t>N1: ¿Por qué grado dos?</a:t>
-            </a:r>
-          </a:p>
-          <a:p>
-            <a:r>
-              <a:t>N2: Porque el grado dos es el tramo que va por encima de treinta y hasta setenta kilovatios, y sesenta y cinco está justo ahí dentro. El truco para no fallar: si no pasa de setenta, todavía no es grado tres; y como supera los treinta, ya no es grado uno. Solo cuando se rebasa el setenta salta a grado tres y hay que individualizar.</a:t>
+              <a:t>N2: La respuesta correcta es la opción B: grado dos. ¿Por qué? Porque el grado dos es el tramo que va por encima de treinta y hasta setenta kilovatios, y sesenta y cinco está justo ahí dentro. El truco para no fallar: como no pasa de setenta, todavía no es grado tres; y como supera los treinta, ya no es grado uno. Solo cuando se rebasa el setenta salta a grado tres y hay que individualizar.</a:t>
+            </a:r>
+          </a:p>
+          <a:p>
+            <a:r>
+              <a:t>N1: Así que sesenta y cinco kilovatios, grado dos. Descartas la opción A y la C por las cifras, y la D ni existe: a una instalación siempre le corresponde un grado.</a:t>
             </a:r>
           </a:p>
         </p:txBody>
@@ -1576,12 +1576,12 @@
           <a:lstStyle/>
           <a:p>
             <a:r>
-              <a:t>N1: Pregunta de las que caen fijo. ¿A qué velocidad como mucho puede circular el gas por el tubo?</a:t>
-            </a:r>
-          </a:p>
-          <a:p>
-            <a:r>
-              <a:t>N2: Piensa en por qué se limita: si el gas corre demasiado, silba y arrastra suciedad. Es un número redondo.</a:t>
+              <a:t>N1: Pregunta de las que caen fijo. Escucha con atención. ¿Cuál es la velocidad máxima admisible del gas dentro de la tubería? Estas son las opciones. Opción A, diez metros por segundo. Opción B, quince metros por segundo. Opción C, veinte metros por segundo. Opción D, veinticinco metros por segundo. Piénsalo un momento antes de que te dé la solución.</a:t>
+            </a:r>
+          </a:p>
+          <a:p>
+            <a:r>
+              <a:t>N2: Una pista: piensa en por qué se limita; si el gas corre demasiado, silba y arrastra suciedad. Y es un número redondo.</a:t>
             </a:r>
           </a:p>
         </p:txBody>
@@ -1651,12 +1651,12 @@
           <a:lstStyle/>
           <a:p>
             <a:r>
-              <a:t>N1: ¿Por qué veinte metros por segundo?</a:t>
-            </a:r>
-          </a:p>
-          <a:p>
-            <a:r>
-              <a:t>N2: Porque la norma pone ese tope para que el gas no vaya tan rápido que empiece a silbar, a vibrar y a arrastrar la suciedad del tubo hasta el aparato. El truco para no fallar: es un número redondo y bajo, veinte, no lo confundas con presiones ni con potencias. Si en el cálculo te pasas de esa velocidad, tienes que subir el diámetro del tubo.</a:t>
+              <a:t>N2: La respuesta correcta es la opción C: veinte metros por segundo. ¿Por qué? Porque la norma pone ese tope para que el gas no vaya tan rápido que empiece a silbar, a vibrar y a arrastrar la suciedad del tubo hasta el aparato. El truco para no fallar: es un número redondo y bajo, veinte, no lo confundas con presiones ni con potencias.</a:t>
+            </a:r>
+          </a:p>
+          <a:p>
+            <a:r>
+              <a:t>N1: Y recuerda: si en el cálculo te pasas de esa velocidad, la solución es subir el diámetro del tubo.</a:t>
             </a:r>
           </a:p>
         </p:txBody>
